--- a/Тема 3/ДВ_3_ИИ_Лекция_3.pptx
+++ b/Тема 3/ДВ_3_ИИ_Лекция_3.pptx
@@ -627,188 +627,6 @@
           <a:bodyPr/>
           <a:lstStyle/>
           <a:p>
-            <a:pPr algn="l"/>
-            <a:r>
-              <a:rPr lang="ru-RU" b="0" i="0" dirty="0">
-                <a:effectLst/>
-                <a:latin typeface="fkGroteskNeue"/>
-              </a:rPr>
-              <a:t>Идея Кокса (1972):</a:t>
-            </a:r>
-          </a:p>
-          <a:p>
-            <a:pPr algn="l"/>
-            <a:r>
-              <a:rPr lang="ru-RU" b="0" i="0" dirty="0">
-                <a:effectLst/>
-                <a:latin typeface="fkGroteskNeue"/>
-              </a:rPr>
-              <a:t>Вместо того, чтобы просто сравнивать группы, давайте моделировать </a:t>
-            </a:r>
-            <a:r>
-              <a:rPr lang="en-US" b="0" i="0" dirty="0">
-                <a:effectLst/>
-                <a:latin typeface="fkGroteskNeue"/>
-              </a:rPr>
-              <a:t>h(t) </a:t>
-            </a:r>
-            <a:r>
-              <a:rPr lang="ru-RU" b="0" i="0" dirty="0">
-                <a:effectLst/>
-                <a:latin typeface="fkGroteskNeue"/>
-              </a:rPr>
-              <a:t>как функцию от признаков </a:t>
-            </a:r>
-            <a:r>
-              <a:rPr lang="en-US" b="0" i="0" dirty="0">
-                <a:effectLst/>
-                <a:latin typeface="fkGroteskNeue"/>
-              </a:rPr>
-              <a:t>X.</a:t>
-            </a:r>
-          </a:p>
-          <a:p>
-            <a:pPr algn="l"/>
-            <a:r>
-              <a:rPr lang="en-US" b="0" i="0" dirty="0">
-                <a:effectLst/>
-                <a:latin typeface="fkGroteskNeue"/>
-              </a:rPr>
-              <a:t>Cox Proportional Hazards Model:</a:t>
-            </a:r>
-          </a:p>
-          <a:p>
-            <a:pPr algn="l"/>
-            <a:r>
-              <a:rPr lang="en-US" b="0" i="0" dirty="0">
-                <a:effectLst/>
-                <a:latin typeface="fkGroteskNeue"/>
-              </a:rPr>
-              <a:t>h(t | X) = h₀(t) × exp(</a:t>
-            </a:r>
-            <a:r>
-              <a:rPr lang="el-GR" b="0" i="0" dirty="0">
-                <a:effectLst/>
-                <a:latin typeface="fkGroteskNeue"/>
-              </a:rPr>
-              <a:t>β₁</a:t>
-            </a:r>
-            <a:r>
-              <a:rPr lang="en-US" b="0" i="0" dirty="0">
-                <a:effectLst/>
-                <a:latin typeface="fkGroteskNeue"/>
-              </a:rPr>
-              <a:t>X₁ + </a:t>
-            </a:r>
-            <a:r>
-              <a:rPr lang="el-GR" b="0" i="0" dirty="0">
-                <a:effectLst/>
-                <a:latin typeface="fkGroteskNeue"/>
-              </a:rPr>
-              <a:t>β₂</a:t>
-            </a:r>
-            <a:r>
-              <a:rPr lang="en-US" b="0" i="0" dirty="0">
-                <a:effectLst/>
-                <a:latin typeface="fkGroteskNeue"/>
-              </a:rPr>
-              <a:t>X₂ + ... + </a:t>
-            </a:r>
-            <a:r>
-              <a:rPr lang="el-GR" b="0" i="0" dirty="0">
-                <a:effectLst/>
-                <a:latin typeface="fkGroteskNeue"/>
-              </a:rPr>
-              <a:t>βₚ</a:t>
-            </a:r>
-            <a:r>
-              <a:rPr lang="en-US" b="0" i="0" dirty="0">
-                <a:effectLst/>
-                <a:latin typeface="fkGroteskNeue"/>
-              </a:rPr>
-              <a:t>Xₚ)</a:t>
-            </a:r>
-          </a:p>
-          <a:p>
-            <a:pPr algn="l"/>
-            <a:r>
-              <a:rPr lang="ru-RU" b="0" i="0" dirty="0">
-                <a:effectLst/>
-                <a:latin typeface="fkGroteskNeue"/>
-              </a:rPr>
-              <a:t>Или в логарифмической форме:</a:t>
-            </a:r>
-          </a:p>
-          <a:p>
-            <a:pPr algn="l"/>
-            <a:r>
-              <a:rPr lang="en-US" b="0" i="0" dirty="0">
-                <a:effectLst/>
-                <a:latin typeface="fkGroteskNeue"/>
-              </a:rPr>
-              <a:t>log(h(t | X)) = log(h₀(t)) + </a:t>
-            </a:r>
-            <a:r>
-              <a:rPr lang="el-GR" b="0" i="0" dirty="0">
-                <a:effectLst/>
-                <a:latin typeface="fkGroteskNeue"/>
-              </a:rPr>
-              <a:t>β₁</a:t>
-            </a:r>
-            <a:r>
-              <a:rPr lang="en-US" b="0" i="0" dirty="0">
-                <a:effectLst/>
-                <a:latin typeface="fkGroteskNeue"/>
-              </a:rPr>
-              <a:t>X₁ + </a:t>
-            </a:r>
-            <a:r>
-              <a:rPr lang="el-GR" b="0" i="0" dirty="0">
-                <a:effectLst/>
-                <a:latin typeface="fkGroteskNeue"/>
-              </a:rPr>
-              <a:t>β₂</a:t>
-            </a:r>
-            <a:r>
-              <a:rPr lang="en-US" b="0" i="0" dirty="0">
-                <a:effectLst/>
-                <a:latin typeface="fkGroteskNeue"/>
-              </a:rPr>
-              <a:t>X₂ + ...</a:t>
-            </a:r>
-          </a:p>
-          <a:p>
-            <a:pPr algn="l"/>
-            <a:r>
-              <a:rPr lang="en-US" b="0" i="0" dirty="0">
-                <a:effectLst/>
-                <a:latin typeface="fkGroteskNeue"/>
-              </a:rPr>
-              <a:t>h₀(t) — "</a:t>
-            </a:r>
-            <a:r>
-              <a:rPr lang="ru-RU" b="0" i="0" dirty="0">
-                <a:effectLst/>
-                <a:latin typeface="fkGroteskNeue"/>
-              </a:rPr>
-              <a:t>базовая опасность" (для пациента с </a:t>
-            </a:r>
-            <a:r>
-              <a:rPr lang="en-US" b="0" i="0" dirty="0">
-                <a:effectLst/>
-                <a:latin typeface="fkGroteskNeue"/>
-              </a:rPr>
-              <a:t>X=0 </a:t>
-            </a:r>
-            <a:r>
-              <a:rPr lang="ru-RU" b="0" i="0" dirty="0">
-                <a:effectLst/>
-                <a:latin typeface="fkGroteskNeue"/>
-              </a:rPr>
-              <a:t>или со средними значениями)</a:t>
-            </a:r>
-          </a:p>
-          <a:p>
             <a:endParaRPr lang="ru-RU" sz="1200" b="0" i="0" kern="1200" dirty="0">
               <a:solidFill>
                 <a:schemeClr val="tx1"/>
@@ -901,239 +719,6 @@
           <a:bodyPr/>
           <a:lstStyle/>
           <a:p>
-            <a:pPr algn="l"/>
-            <a:r>
-              <a:rPr lang="ru-RU" b="0" i="0" dirty="0">
-                <a:effectLst/>
-                <a:latin typeface="fkGroteskNeue"/>
-              </a:rPr>
-              <a:t>Интерпретация β:</a:t>
-            </a:r>
-          </a:p>
-          <a:p>
-            <a:pPr algn="l"/>
-            <a:r>
-              <a:rPr lang="ru-RU" b="0" i="0" dirty="0">
-                <a:effectLst/>
-                <a:latin typeface="fkGroteskNeue"/>
-              </a:rPr>
-              <a:t>β = 0.5 для признака X₁</a:t>
-            </a:r>
-          </a:p>
-          <a:p>
-            <a:pPr algn="l"/>
-            <a:r>
-              <a:rPr lang="ru-RU" b="0" i="0" dirty="0">
-                <a:effectLst/>
-                <a:latin typeface="fkGroteskNeue"/>
-              </a:rPr>
-              <a:t>Это значит: каждая единица увеличения X₁ увеличивает </a:t>
-            </a:r>
-            <a:r>
-              <a:rPr lang="ru-RU" b="0" i="0" dirty="0" err="1">
-                <a:effectLst/>
-                <a:latin typeface="fkGroteskNeue"/>
-              </a:rPr>
-              <a:t>log-hazard</a:t>
-            </a:r>
-            <a:r>
-              <a:rPr lang="ru-RU" b="0" i="0" dirty="0">
-                <a:effectLst/>
-                <a:latin typeface="fkGroteskNeue"/>
-              </a:rPr>
-              <a:t> на 0.5.</a:t>
-            </a:r>
-          </a:p>
-          <a:p>
-            <a:pPr algn="l"/>
-            <a:r>
-              <a:rPr lang="ru-RU" b="0" i="0" dirty="0">
-                <a:effectLst/>
-                <a:latin typeface="fkGroteskNeue"/>
-              </a:rPr>
-              <a:t>Или: </a:t>
-            </a:r>
-            <a:r>
-              <a:rPr lang="ru-RU" b="0" i="0" dirty="0" err="1">
-                <a:effectLst/>
-                <a:latin typeface="fkGroteskNeue"/>
-              </a:rPr>
-              <a:t>Hazard</a:t>
-            </a:r>
-            <a:r>
-              <a:rPr lang="ru-RU" b="0" i="0" dirty="0">
-                <a:effectLst/>
-                <a:latin typeface="fkGroteskNeue"/>
-              </a:rPr>
-              <a:t> увеличивается в e^0.5 ≈ 1.65 раз.</a:t>
-            </a:r>
-          </a:p>
-          <a:p>
-            <a:pPr algn="l"/>
-            <a:r>
-              <a:rPr lang="ru-RU" b="0" i="0" dirty="0">
-                <a:effectLst/>
-                <a:latin typeface="fkGroteskNeue"/>
-              </a:rPr>
-              <a:t>Пример: TP53 мутация</a:t>
-            </a:r>
-          </a:p>
-          <a:p>
-            <a:pPr algn="l"/>
-            <a:r>
-              <a:rPr lang="ru-RU" b="0" i="0" dirty="0">
-                <a:effectLst/>
-                <a:latin typeface="fkGroteskNeue"/>
-              </a:rPr>
-              <a:t>β = 1. для "TP53 мутирован" (0 = нет, 1 = да)</a:t>
-            </a:r>
-          </a:p>
-          <a:p>
-            <a:pPr algn="l"/>
-            <a:r>
-              <a:rPr lang="ru-RU" b="0" i="0" dirty="0">
-                <a:effectLst/>
-                <a:latin typeface="fkGroteskNeue"/>
-              </a:rPr>
-              <a:t>Пациент с TP53 мутацией имеет </a:t>
-            </a:r>
-            <a:r>
-              <a:rPr lang="ru-RU" b="0" i="0" dirty="0" err="1">
-                <a:effectLst/>
-                <a:latin typeface="fkGroteskNeue"/>
-              </a:rPr>
-              <a:t>hazard</a:t>
-            </a:r>
-            <a:r>
-              <a:rPr lang="ru-RU" b="0" i="0" dirty="0">
-                <a:effectLst/>
-                <a:latin typeface="fkGroteskNeue"/>
-              </a:rPr>
-              <a:t> в e^1.0 ≈ 2,7 раза выше, чем без мутации.</a:t>
-            </a:r>
-          </a:p>
-          <a:p>
-            <a:pPr algn="l"/>
-            <a:r>
-              <a:rPr lang="ru-RU" b="0" i="0" dirty="0">
-                <a:effectLst/>
-                <a:latin typeface="fkGroteskNeue"/>
-              </a:rPr>
-              <a:t>Медицинская интерпретация:</a:t>
-            </a:r>
-            <a:br>
-              <a:rPr lang="ru-RU" b="0" i="0" dirty="0">
-                <a:effectLst/>
-                <a:latin typeface="fkGroteskNeue"/>
-              </a:rPr>
-            </a:br>
-            <a:r>
-              <a:rPr lang="ru-RU" b="0" i="0" dirty="0">
-                <a:effectLst/>
-                <a:latin typeface="fkGroteskNeue"/>
-              </a:rPr>
-              <a:t>"Пациент с TP53 мутацией имеет риск рецидива в 3.3 раза выше.«</a:t>
-            </a:r>
-          </a:p>
-          <a:p>
-            <a:pPr algn="l"/>
-            <a:r>
-              <a:rPr lang="en-US" b="0" i="0" dirty="0">
-                <a:effectLst/>
-                <a:latin typeface="fkGroteskNeue"/>
-              </a:rPr>
-              <a:t>Hazard Ratio (HR) = e^</a:t>
-            </a:r>
-            <a:r>
-              <a:rPr lang="el-GR" b="0" i="0" dirty="0">
-                <a:effectLst/>
-                <a:latin typeface="fkGroteskNeue"/>
-              </a:rPr>
-              <a:t>β</a:t>
-            </a:r>
-          </a:p>
-          <a:p>
-            <a:pPr algn="l">
-              <a:buFont typeface="Arial" panose="020B0604020202020204" pitchFamily="34" charset="0"/>
-              <a:buChar char="•"/>
-            </a:pPr>
-            <a:r>
-              <a:rPr lang="en-US" b="0" i="0" dirty="0">
-                <a:effectLst/>
-                <a:latin typeface="fkGroteskNeue"/>
-              </a:rPr>
-              <a:t>HR = 1: </a:t>
-            </a:r>
-            <a:r>
-              <a:rPr lang="ru-RU" b="0" i="0" dirty="0">
-                <a:effectLst/>
-                <a:latin typeface="fkGroteskNeue"/>
-              </a:rPr>
-              <a:t>нет эффекта</a:t>
-            </a:r>
-          </a:p>
-          <a:p>
-            <a:pPr algn="l">
-              <a:buFont typeface="Arial" panose="020B0604020202020204" pitchFamily="34" charset="0"/>
-              <a:buChar char="•"/>
-            </a:pPr>
-            <a:r>
-              <a:rPr lang="en-US" b="0" i="0" dirty="0">
-                <a:effectLst/>
-                <a:latin typeface="fkGroteskNeue"/>
-              </a:rPr>
-              <a:t>HR &gt; 1: </a:t>
-            </a:r>
-            <a:r>
-              <a:rPr lang="ru-RU" b="0" i="0" dirty="0">
-                <a:effectLst/>
-                <a:latin typeface="fkGroteskNeue"/>
-              </a:rPr>
-              <a:t>увеличивает риск (</a:t>
-            </a:r>
-            <a:r>
-              <a:rPr lang="en-US" b="0" i="0" dirty="0">
-                <a:effectLst/>
-                <a:latin typeface="fkGroteskNeue"/>
-              </a:rPr>
-              <a:t>risk factor)</a:t>
-            </a:r>
-          </a:p>
-          <a:p>
-            <a:pPr algn="l">
-              <a:buFont typeface="Arial" panose="020B0604020202020204" pitchFamily="34" charset="0"/>
-              <a:buChar char="•"/>
-            </a:pPr>
-            <a:r>
-              <a:rPr lang="en-US" b="0" i="0" dirty="0">
-                <a:effectLst/>
-                <a:latin typeface="fkGroteskNeue"/>
-              </a:rPr>
-              <a:t>HR &lt; 1: </a:t>
-            </a:r>
-            <a:r>
-              <a:rPr lang="ru-RU" b="0" i="0" dirty="0">
-                <a:effectLst/>
-                <a:latin typeface="fkGroteskNeue"/>
-              </a:rPr>
-              <a:t>уменьшает риск (</a:t>
-            </a:r>
-            <a:r>
-              <a:rPr lang="en-US" b="0" i="0" dirty="0">
-                <a:effectLst/>
-                <a:latin typeface="fkGroteskNeue"/>
-              </a:rPr>
-              <a:t>protective factor)</a:t>
-            </a:r>
-          </a:p>
-          <a:p>
-            <a:pPr algn="l"/>
-            <a:endParaRPr lang="ru-RU" b="0" i="0" dirty="0">
-              <a:effectLst/>
-              <a:latin typeface="fkGroteskNeue"/>
-            </a:endParaRPr>
-          </a:p>
-          <a:p>
             <a:endParaRPr lang="ru-RU" sz="1200" b="0" i="0" kern="1200" dirty="0">
               <a:solidFill>
                 <a:schemeClr val="tx1"/>
@@ -1226,283 +811,6 @@
           <a:bodyPr/>
           <a:lstStyle/>
           <a:p>
-            <a:pPr algn="l"/>
-            <a:r>
-              <a:rPr lang="ru-RU" b="0" i="0" dirty="0">
-                <a:effectLst/>
-                <a:latin typeface="fkGroteskNeue"/>
-              </a:rPr>
-              <a:t>Пример: Рак молочной железы</a:t>
-            </a:r>
-          </a:p>
-          <a:p>
-            <a:pPr algn="l"/>
-            <a:r>
-              <a:rPr lang="ru-RU" b="0" i="0" dirty="0" err="1">
-                <a:effectLst/>
-                <a:latin typeface="fkGroteskNeue"/>
-              </a:rPr>
-              <a:t>Датасет</a:t>
-            </a:r>
-            <a:r>
-              <a:rPr lang="ru-RU" b="0" i="0" dirty="0">
-                <a:effectLst/>
-                <a:latin typeface="fkGroteskNeue"/>
-              </a:rPr>
-              <a:t>: 400 пациентов, </a:t>
-            </a:r>
-            <a:r>
-              <a:rPr lang="en-US" b="0" i="0" dirty="0">
-                <a:effectLst/>
-                <a:latin typeface="fkGroteskNeue"/>
-              </a:rPr>
-              <a:t>median follow-up </a:t>
-            </a:r>
-            <a:r>
-              <a:rPr lang="ru-RU" b="0" i="0" dirty="0">
-                <a:effectLst/>
-                <a:latin typeface="fkGroteskNeue"/>
-              </a:rPr>
-              <a:t>5</a:t>
-            </a:r>
-            <a:r>
-              <a:rPr lang="en-US" b="0" i="0" dirty="0">
-                <a:effectLst/>
-                <a:latin typeface="fkGroteskNeue"/>
-              </a:rPr>
-              <a:t> </a:t>
-            </a:r>
-            <a:r>
-              <a:rPr lang="ru-RU" b="0" i="0" dirty="0">
-                <a:effectLst/>
-                <a:latin typeface="fkGroteskNeue"/>
-              </a:rPr>
-              <a:t>лет, 85 смертей.</a:t>
-            </a:r>
-          </a:p>
-          <a:p>
-            <a:pPr algn="l"/>
-            <a:r>
-              <a:rPr lang="ru-RU" b="0" i="0" dirty="0">
-                <a:effectLst/>
-                <a:latin typeface="fkGroteskNeue"/>
-              </a:rPr>
-              <a:t>Признаки:</a:t>
-            </a:r>
-          </a:p>
-          <a:p>
-            <a:pPr algn="l">
-              <a:buFont typeface="+mj-lt"/>
-              <a:buAutoNum type="arabicPeriod"/>
-            </a:pPr>
-            <a:r>
-              <a:rPr lang="ru-RU" b="0" i="0" dirty="0">
-                <a:effectLst/>
-                <a:latin typeface="fkGroteskNeue"/>
-              </a:rPr>
-              <a:t>Возраст (</a:t>
-            </a:r>
-            <a:r>
-              <a:rPr lang="en-US" b="0" i="0" dirty="0">
-                <a:effectLst/>
-                <a:latin typeface="fkGroteskNeue"/>
-              </a:rPr>
-              <a:t>years)</a:t>
-            </a:r>
-          </a:p>
-          <a:p>
-            <a:pPr algn="l">
-              <a:buFont typeface="+mj-lt"/>
-              <a:buAutoNum type="arabicPeriod"/>
-            </a:pPr>
-            <a:r>
-              <a:rPr lang="ru-RU" b="0" i="0" dirty="0">
-                <a:effectLst/>
-                <a:latin typeface="fkGroteskNeue"/>
-              </a:rPr>
-              <a:t>Размер опухоли (</a:t>
-            </a:r>
-            <a:r>
-              <a:rPr lang="en-US" b="0" i="0" dirty="0">
-                <a:effectLst/>
-                <a:latin typeface="fkGroteskNeue"/>
-              </a:rPr>
-              <a:t>cm)</a:t>
-            </a:r>
-          </a:p>
-          <a:p>
-            <a:pPr algn="l">
-              <a:buFont typeface="+mj-lt"/>
-              <a:buAutoNum type="arabicPeriod"/>
-            </a:pPr>
-            <a:r>
-              <a:rPr lang="ru-RU" b="0" i="0" dirty="0">
-                <a:effectLst/>
-                <a:latin typeface="fkGroteskNeue"/>
-              </a:rPr>
-              <a:t>Степень (</a:t>
-            </a:r>
-            <a:r>
-              <a:rPr lang="en-US" b="0" i="0" dirty="0">
-                <a:effectLst/>
-                <a:latin typeface="fkGroteskNeue"/>
-              </a:rPr>
-              <a:t>grade): 1, 2, 3</a:t>
-            </a:r>
-          </a:p>
-          <a:p>
-            <a:pPr algn="l">
-              <a:buFont typeface="+mj-lt"/>
-              <a:buAutoNum type="arabicPeriod"/>
-            </a:pPr>
-            <a:r>
-              <a:rPr lang="en-US" b="0" i="0" dirty="0">
-                <a:effectLst/>
-                <a:latin typeface="fkGroteskNeue"/>
-              </a:rPr>
-              <a:t>ER status: 0 (negative), 1 (positive)</a:t>
-            </a:r>
-            <a:endParaRPr lang="ru-RU" b="0" i="0" dirty="0">
-              <a:effectLst/>
-              <a:latin typeface="fkGroteskNeue"/>
-            </a:endParaRPr>
-          </a:p>
-          <a:p>
-            <a:pPr algn="l"/>
-            <a:r>
-              <a:rPr lang="ru-RU" b="0" i="0" dirty="0">
-                <a:effectLst/>
-                <a:latin typeface="fkGroteskNeue"/>
-              </a:rPr>
-              <a:t>Интерпретация:</a:t>
-            </a:r>
-          </a:p>
-          <a:p>
-            <a:pPr algn="l">
-              <a:buFont typeface="Arial" panose="020B0604020202020204" pitchFamily="34" charset="0"/>
-              <a:buChar char="•"/>
-            </a:pPr>
-            <a:r>
-              <a:rPr lang="ru-RU" b="0" i="0" dirty="0">
-                <a:effectLst/>
-                <a:latin typeface="fkGroteskNeue"/>
-              </a:rPr>
-              <a:t>Размер опухоли: каждый см увеличивает HR на 5%. </a:t>
-            </a:r>
-          </a:p>
-          <a:p>
-            <a:pPr algn="l">
-              <a:buFont typeface="Arial" panose="020B0604020202020204" pitchFamily="34" charset="0"/>
-              <a:buChar char="•"/>
-            </a:pPr>
-            <a:r>
-              <a:rPr lang="ru-RU" b="0" i="0" dirty="0" err="1">
-                <a:effectLst/>
-                <a:latin typeface="fkGroteskNeue"/>
-              </a:rPr>
-              <a:t>Grade</a:t>
-            </a:r>
-            <a:r>
-              <a:rPr lang="ru-RU" b="0" i="0" dirty="0">
-                <a:effectLst/>
-                <a:latin typeface="fkGroteskNeue"/>
-              </a:rPr>
-              <a:t> (3 </a:t>
-            </a:r>
-            <a:r>
-              <a:rPr lang="ru-RU" b="0" i="0" dirty="0" err="1">
-                <a:effectLst/>
-                <a:latin typeface="fkGroteskNeue"/>
-              </a:rPr>
-              <a:t>vs</a:t>
-            </a:r>
-            <a:r>
-              <a:rPr lang="ru-RU" b="0" i="0" dirty="0">
-                <a:effectLst/>
-                <a:latin typeface="fkGroteskNeue"/>
-              </a:rPr>
-              <a:t> 1): пациентки с </a:t>
-            </a:r>
-            <a:r>
-              <a:rPr lang="ru-RU" b="0" i="0" dirty="0" err="1">
-                <a:effectLst/>
-                <a:latin typeface="fkGroteskNeue"/>
-              </a:rPr>
-              <a:t>Grade</a:t>
-            </a:r>
-            <a:r>
-              <a:rPr lang="ru-RU" b="0" i="0" dirty="0">
-                <a:effectLst/>
-                <a:latin typeface="fkGroteskNeue"/>
-              </a:rPr>
-              <a:t> 3 имеют в 3 раза выше </a:t>
-            </a:r>
-            <a:r>
-              <a:rPr lang="ru-RU" b="0" i="0" dirty="0" err="1">
-                <a:effectLst/>
-                <a:latin typeface="fkGroteskNeue"/>
-              </a:rPr>
-              <a:t>risk</a:t>
-            </a:r>
-            <a:r>
-              <a:rPr lang="ru-RU" b="0" i="0" dirty="0">
-                <a:effectLst/>
-                <a:latin typeface="fkGroteskNeue"/>
-              </a:rPr>
-              <a:t> смерти. Очень значимо (p &lt;0.001).</a:t>
-            </a:r>
-          </a:p>
-          <a:p>
-            <a:pPr algn="l">
-              <a:buFont typeface="Arial" panose="020B0604020202020204" pitchFamily="34" charset="0"/>
-              <a:buChar char="•"/>
-            </a:pPr>
-            <a:r>
-              <a:rPr lang="ru-RU" b="0" i="0" dirty="0">
-                <a:effectLst/>
-                <a:latin typeface="fkGroteskNeue"/>
-              </a:rPr>
-              <a:t>ER+: ER+ пациентки имеют на 60% ниже </a:t>
-            </a:r>
-            <a:r>
-              <a:rPr lang="ru-RU" b="0" i="0" dirty="0" err="1">
-                <a:effectLst/>
-                <a:latin typeface="fkGroteskNeue"/>
-              </a:rPr>
-              <a:t>risk</a:t>
-            </a:r>
-            <a:r>
-              <a:rPr lang="ru-RU" b="0" i="0" dirty="0">
-                <a:effectLst/>
-                <a:latin typeface="fkGroteskNeue"/>
-              </a:rPr>
-              <a:t> (HR 0.40). Это хороший прогностический фактор.</a:t>
-            </a:r>
-          </a:p>
-          <a:p>
-            <a:pPr algn="l">
-              <a:buFont typeface="Arial" panose="020B0604020202020204" pitchFamily="34" charset="0"/>
-              <a:buChar char="•"/>
-            </a:pPr>
-            <a:r>
-              <a:rPr lang="ru-RU" b="0" i="0" dirty="0">
-                <a:effectLst/>
-                <a:latin typeface="fkGroteskNeue"/>
-              </a:rPr>
-              <a:t>Возраст: пограничный (p=0.10), не совсем значим.</a:t>
-            </a:r>
-          </a:p>
-          <a:p>
-            <a:pPr algn="l">
-              <a:buFont typeface="+mj-lt"/>
-              <a:buAutoNum type="arabicPeriod"/>
-            </a:pPr>
-            <a:endParaRPr lang="ru-RU" b="0" i="0" dirty="0">
-              <a:effectLst/>
-              <a:latin typeface="fkGroteskNeue"/>
-            </a:endParaRPr>
-          </a:p>
-          <a:p>
             <a:endParaRPr lang="ru-RU" sz="1200" b="0" i="0" kern="1200" dirty="0">
               <a:solidFill>
                 <a:schemeClr val="tx1"/>
@@ -1595,194 +903,6 @@
           <a:bodyPr/>
           <a:lstStyle/>
           <a:p>
-            <a:pPr algn="l"/>
-            <a:r>
-              <a:rPr lang="ru-RU" b="0" i="0" dirty="0">
-                <a:effectLst/>
-                <a:latin typeface="fkGroteskNeue"/>
-              </a:rPr>
-              <a:t>Стратификация пациентов:</a:t>
-            </a:r>
-          </a:p>
-          <a:p>
-            <a:pPr algn="l"/>
-            <a:r>
-              <a:rPr lang="ru-RU" b="0" i="0" dirty="0">
-                <a:effectLst/>
-                <a:latin typeface="fkGroteskNeue"/>
-              </a:rPr>
-              <a:t>На основе </a:t>
-            </a:r>
-            <a:r>
-              <a:rPr lang="ru-RU" b="0" i="0" dirty="0" err="1">
-                <a:effectLst/>
-                <a:latin typeface="fkGroteskNeue"/>
-              </a:rPr>
-              <a:t>risk</a:t>
-            </a:r>
-            <a:r>
-              <a:rPr lang="ru-RU" b="0" i="0" dirty="0">
-                <a:effectLst/>
-                <a:latin typeface="fkGroteskNeue"/>
-              </a:rPr>
-              <a:t> </a:t>
-            </a:r>
-            <a:r>
-              <a:rPr lang="ru-RU" b="0" i="0" dirty="0" err="1">
-                <a:effectLst/>
-                <a:latin typeface="fkGroteskNeue"/>
-              </a:rPr>
-              <a:t>score</a:t>
-            </a:r>
-            <a:r>
-              <a:rPr lang="ru-RU" b="0" i="0" dirty="0">
-                <a:effectLst/>
-                <a:latin typeface="fkGroteskNeue"/>
-              </a:rPr>
-              <a:t> разделяем на 3 группы:</a:t>
-            </a:r>
-          </a:p>
-          <a:p>
-            <a:pPr algn="l">
-              <a:buFont typeface="Arial" panose="020B0604020202020204" pitchFamily="34" charset="0"/>
-              <a:buChar char="•"/>
-            </a:pPr>
-            <a:r>
-              <a:rPr lang="ru-RU" b="0" i="0" dirty="0" err="1">
-                <a:effectLst/>
-                <a:latin typeface="fkGroteskNeue"/>
-              </a:rPr>
-              <a:t>Low</a:t>
-            </a:r>
-            <a:r>
-              <a:rPr lang="ru-RU" b="0" i="0" dirty="0">
-                <a:effectLst/>
-                <a:latin typeface="fkGroteskNeue"/>
-              </a:rPr>
-              <a:t> </a:t>
-            </a:r>
-            <a:r>
-              <a:rPr lang="ru-RU" b="0" i="0" dirty="0" err="1">
-                <a:effectLst/>
-                <a:latin typeface="fkGroteskNeue"/>
-              </a:rPr>
-              <a:t>risk</a:t>
-            </a:r>
-            <a:r>
-              <a:rPr lang="ru-RU" b="0" i="0" dirty="0">
-                <a:effectLst/>
-                <a:latin typeface="fkGroteskNeue"/>
-              </a:rPr>
-              <a:t> (</a:t>
-            </a:r>
-            <a:r>
-              <a:rPr lang="ru-RU" b="0" i="0" dirty="0" err="1">
-                <a:effectLst/>
-                <a:latin typeface="fkGroteskNeue"/>
-              </a:rPr>
-              <a:t>score</a:t>
-            </a:r>
-            <a:r>
-              <a:rPr lang="ru-RU" b="0" i="0" dirty="0">
-                <a:effectLst/>
-                <a:latin typeface="fkGroteskNeue"/>
-              </a:rPr>
-              <a:t> &lt; 1): S(5) = 0.92 (8% имели события за 5 лет)</a:t>
-            </a:r>
-          </a:p>
-          <a:p>
-            <a:pPr algn="l">
-              <a:buFont typeface="Arial" panose="020B0604020202020204" pitchFamily="34" charset="0"/>
-              <a:buChar char="•"/>
-            </a:pPr>
-            <a:r>
-              <a:rPr lang="ru-RU" b="0" i="0" dirty="0" err="1">
-                <a:effectLst/>
-                <a:latin typeface="fkGroteskNeue"/>
-              </a:rPr>
-              <a:t>Medium</a:t>
-            </a:r>
-            <a:r>
-              <a:rPr lang="ru-RU" b="0" i="0" dirty="0">
-                <a:effectLst/>
-                <a:latin typeface="fkGroteskNeue"/>
-              </a:rPr>
-              <a:t> </a:t>
-            </a:r>
-            <a:r>
-              <a:rPr lang="ru-RU" b="0" i="0" dirty="0" err="1">
-                <a:effectLst/>
-                <a:latin typeface="fkGroteskNeue"/>
-              </a:rPr>
-              <a:t>risk</a:t>
-            </a:r>
-            <a:r>
-              <a:rPr lang="ru-RU" b="0" i="0" dirty="0">
-                <a:effectLst/>
-                <a:latin typeface="fkGroteskNeue"/>
-              </a:rPr>
-              <a:t> (1-3): S(5) = 0.75 (25% имели события)</a:t>
-            </a:r>
-          </a:p>
-          <a:p>
-            <a:pPr algn="l">
-              <a:buFont typeface="Arial" panose="020B0604020202020204" pitchFamily="34" charset="0"/>
-              <a:buChar char="•"/>
-            </a:pPr>
-            <a:r>
-              <a:rPr lang="ru-RU" b="0" i="0" dirty="0">
-                <a:effectLst/>
-                <a:latin typeface="fkGroteskNeue"/>
-              </a:rPr>
-              <a:t>High </a:t>
-            </a:r>
-            <a:r>
-              <a:rPr lang="ru-RU" b="0" i="0" dirty="0" err="1">
-                <a:effectLst/>
-                <a:latin typeface="fkGroteskNeue"/>
-              </a:rPr>
-              <a:t>risk</a:t>
-            </a:r>
-            <a:r>
-              <a:rPr lang="ru-RU" b="0" i="0" dirty="0">
-                <a:effectLst/>
-                <a:latin typeface="fkGroteskNeue"/>
-              </a:rPr>
-              <a:t> (&gt;3): S(5) = 0.45 (55% имели события за 5 лет)</a:t>
-            </a:r>
-          </a:p>
-          <a:p>
-            <a:pPr algn="l"/>
-            <a:r>
-              <a:rPr lang="ru-RU" b="0" i="0" dirty="0" err="1">
-                <a:effectLst/>
-                <a:latin typeface="fkGroteskNeue"/>
-              </a:rPr>
-              <a:t>Log-rank</a:t>
-            </a:r>
-            <a:r>
-              <a:rPr lang="ru-RU" b="0" i="0" dirty="0">
-                <a:effectLst/>
-                <a:latin typeface="fkGroteskNeue"/>
-              </a:rPr>
-              <a:t> </a:t>
-            </a:r>
-            <a:r>
-              <a:rPr lang="ru-RU" b="0" i="0" dirty="0" err="1">
-                <a:effectLst/>
-                <a:latin typeface="fkGroteskNeue"/>
-              </a:rPr>
-              <a:t>test</a:t>
-            </a:r>
-            <a:r>
-              <a:rPr lang="ru-RU" b="0" i="0" dirty="0">
-                <a:effectLst/>
-                <a:latin typeface="fkGroteskNeue"/>
-              </a:rPr>
-              <a:t>: p &lt; 0.0001 (группы очень различаются)</a:t>
-            </a:r>
-          </a:p>
-          <a:p>
             <a:endParaRPr lang="ru-RU" sz="1200" b="0" i="0" kern="1200" dirty="0">
               <a:solidFill>
                 <a:schemeClr val="tx1"/>
@@ -1875,308 +995,6 @@
           <a:bodyPr/>
           <a:lstStyle/>
           <a:p>
-            <a:pPr algn="l"/>
-            <a:r>
-              <a:rPr lang="ru-RU" b="0" i="0" dirty="0">
-                <a:effectLst/>
-                <a:latin typeface="fkGroteskNeue"/>
-              </a:rPr>
-              <a:t>Предпосылки </a:t>
-            </a:r>
-            <a:r>
-              <a:rPr lang="en-US" b="0" i="0" dirty="0">
-                <a:effectLst/>
-                <a:latin typeface="fkGroteskNeue"/>
-              </a:rPr>
-              <a:t>Cox </a:t>
-            </a:r>
-            <a:r>
-              <a:rPr lang="ru-RU" b="0" i="0" dirty="0">
-                <a:effectLst/>
-                <a:latin typeface="fkGroteskNeue"/>
-              </a:rPr>
-              <a:t>модели:</a:t>
-            </a:r>
-          </a:p>
-          <a:p>
-            <a:pPr algn="l">
-              <a:buFont typeface="+mj-lt"/>
-              <a:buAutoNum type="arabicPeriod"/>
-            </a:pPr>
-            <a:r>
-              <a:rPr lang="ru-RU" b="0" i="0" dirty="0">
-                <a:effectLst/>
-                <a:latin typeface="fkGroteskNeue"/>
-              </a:rPr>
-              <a:t>Пропорциональность рисков (</a:t>
-            </a:r>
-            <a:r>
-              <a:rPr lang="en-US" b="0" i="0" dirty="0">
-                <a:effectLst/>
-                <a:latin typeface="fkGroteskNeue"/>
-              </a:rPr>
-              <a:t>PH Assumption):</a:t>
-            </a:r>
-          </a:p>
-          <a:p>
-            <a:pPr algn="l"/>
-            <a:r>
-              <a:rPr lang="en-US" b="0" i="0" dirty="0">
-                <a:effectLst/>
-                <a:latin typeface="fkGroteskNeue"/>
-              </a:rPr>
-              <a:t>Ratio hazard</a:t>
-            </a:r>
-            <a:r>
-              <a:rPr lang="ru-RU" b="0" i="0" dirty="0" err="1">
-                <a:effectLst/>
-                <a:latin typeface="fkGroteskNeue"/>
-              </a:rPr>
-              <a:t>ов</a:t>
-            </a:r>
-            <a:r>
-              <a:rPr lang="ru-RU" b="0" i="0" dirty="0">
-                <a:effectLst/>
-                <a:latin typeface="fkGroteskNeue"/>
-              </a:rPr>
-              <a:t> между двумя группами должен быть постоянным во времени.</a:t>
-            </a:r>
-          </a:p>
-          <a:p>
-            <a:pPr algn="l"/>
-            <a:r>
-              <a:rPr lang="ru-RU" b="0" i="0" dirty="0">
-                <a:effectLst/>
-                <a:latin typeface="fkGroteskNeue"/>
-              </a:rPr>
-              <a:t>То есть если </a:t>
-            </a:r>
-            <a:r>
-              <a:rPr lang="en-US" b="0" i="0" dirty="0">
-                <a:effectLst/>
-                <a:latin typeface="fkGroteskNeue"/>
-              </a:rPr>
-              <a:t>Group A </a:t>
-            </a:r>
-            <a:r>
-              <a:rPr lang="ru-RU" b="0" i="0" dirty="0">
-                <a:effectLst/>
-                <a:latin typeface="fkGroteskNeue"/>
-              </a:rPr>
-              <a:t>имеет </a:t>
-            </a:r>
-            <a:r>
-              <a:rPr lang="en-US" b="0" i="0" dirty="0">
-                <a:effectLst/>
-                <a:latin typeface="fkGroteskNeue"/>
-              </a:rPr>
-              <a:t>HR=2 </a:t>
-            </a:r>
-            <a:r>
-              <a:rPr lang="ru-RU" b="0" i="0" dirty="0">
-                <a:effectLst/>
-                <a:latin typeface="fkGroteskNeue"/>
-              </a:rPr>
-              <a:t>в день 100, она должна иметь </a:t>
-            </a:r>
-            <a:r>
-              <a:rPr lang="en-US" b="0" i="0" dirty="0">
-                <a:effectLst/>
-                <a:latin typeface="fkGroteskNeue"/>
-              </a:rPr>
-              <a:t>HR≈2 </a:t>
-            </a:r>
-            <a:r>
-              <a:rPr lang="ru-RU" b="0" i="0" dirty="0">
-                <a:effectLst/>
-                <a:latin typeface="fkGroteskNeue"/>
-              </a:rPr>
-              <a:t>и в день 1000.</a:t>
-            </a:r>
-          </a:p>
-          <a:p>
-            <a:pPr algn="l"/>
-            <a:r>
-              <a:rPr lang="ru-RU" b="0" i="0" dirty="0">
-                <a:effectLst/>
-                <a:latin typeface="fkGroteskNeue"/>
-              </a:rPr>
-              <a:t>Если график </a:t>
-            </a:r>
-            <a:r>
-              <a:rPr lang="en-US" b="0" i="0" dirty="0">
-                <a:effectLst/>
-                <a:latin typeface="fkGroteskNeue"/>
-              </a:rPr>
-              <a:t>log(-log(S(t))) vs log(t) </a:t>
-            </a:r>
-            <a:r>
-              <a:rPr lang="ru-RU" b="0" i="0" dirty="0">
-                <a:effectLst/>
-                <a:latin typeface="fkGroteskNeue"/>
-              </a:rPr>
-              <a:t>для двух групп параллельны → </a:t>
-            </a:r>
-            <a:r>
-              <a:rPr lang="en-US" b="0" i="0" dirty="0">
-                <a:effectLst/>
-                <a:latin typeface="fkGroteskNeue"/>
-              </a:rPr>
-              <a:t>OK.</a:t>
-            </a:r>
-          </a:p>
-          <a:p>
-            <a:pPr algn="l"/>
-            <a:r>
-              <a:rPr lang="ru-RU" b="0" i="0" dirty="0">
-                <a:effectLst/>
-                <a:latin typeface="fkGroteskNeue"/>
-              </a:rPr>
-              <a:t>Или: тест </a:t>
-            </a:r>
-            <a:r>
-              <a:rPr lang="en-US" b="0" i="0" dirty="0">
-                <a:effectLst/>
-                <a:latin typeface="fkGroteskNeue"/>
-              </a:rPr>
-              <a:t>Schoenfeld residuals, p &gt; 0.05 → PH assumption </a:t>
-            </a:r>
-            <a:r>
-              <a:rPr lang="ru-RU" b="0" i="0" dirty="0">
-                <a:effectLst/>
-                <a:latin typeface="fkGroteskNeue"/>
-              </a:rPr>
-              <a:t>не нарушена.</a:t>
-            </a:r>
-          </a:p>
-          <a:p>
-            <a:pPr algn="l"/>
-            <a:r>
-              <a:rPr lang="ru-RU" b="0" i="0" dirty="0">
-                <a:effectLst/>
-                <a:latin typeface="fkGroteskNeue"/>
-              </a:rPr>
-              <a:t>Если </a:t>
-            </a:r>
-            <a:r>
-              <a:rPr lang="en-US" b="0" i="0" dirty="0">
-                <a:effectLst/>
-                <a:latin typeface="fkGroteskNeue"/>
-              </a:rPr>
-              <a:t>PH </a:t>
-            </a:r>
-            <a:r>
-              <a:rPr lang="ru-RU" b="0" i="0" dirty="0">
-                <a:effectLst/>
-                <a:latin typeface="fkGroteskNeue"/>
-              </a:rPr>
-              <a:t>нарушена? Добавить </a:t>
-            </a:r>
-            <a:r>
-              <a:rPr lang="en-US" b="0" i="0" dirty="0">
-                <a:effectLst/>
-                <a:latin typeface="fkGroteskNeue"/>
-              </a:rPr>
-              <a:t>time-dependent coefficient: </a:t>
-            </a:r>
-            <a:r>
-              <a:rPr lang="el-GR" b="0" i="0" dirty="0">
-                <a:effectLst/>
-                <a:latin typeface="fkGroteskNeue"/>
-              </a:rPr>
-              <a:t>β(</a:t>
-            </a:r>
-            <a:r>
-              <a:rPr lang="en-US" b="0" i="0" dirty="0">
-                <a:effectLst/>
-                <a:latin typeface="fkGroteskNeue"/>
-              </a:rPr>
-              <a:t>t).</a:t>
-            </a:r>
-          </a:p>
-          <a:p>
-            <a:pPr algn="l">
-              <a:buFont typeface="+mj-lt"/>
-              <a:buAutoNum type="arabicPeriod" startAt="2"/>
-            </a:pPr>
-            <a:r>
-              <a:rPr lang="ru-RU" b="0" i="0" dirty="0">
-                <a:effectLst/>
-                <a:latin typeface="fkGroteskNeue"/>
-              </a:rPr>
-              <a:t>Линейность в логарифме:</a:t>
-            </a:r>
-          </a:p>
-          <a:p>
-            <a:pPr algn="l"/>
-            <a:r>
-              <a:rPr lang="ru-RU" b="0" i="0" dirty="0">
-                <a:effectLst/>
-                <a:latin typeface="fkGroteskNeue"/>
-              </a:rPr>
-              <a:t>Связь между </a:t>
-            </a:r>
-            <a:r>
-              <a:rPr lang="en-US" b="0" i="0" dirty="0">
-                <a:effectLst/>
-                <a:latin typeface="fkGroteskNeue"/>
-              </a:rPr>
-              <a:t>X </a:t>
-            </a:r>
-            <a:r>
-              <a:rPr lang="ru-RU" b="0" i="0" dirty="0">
-                <a:effectLst/>
-                <a:latin typeface="fkGroteskNeue"/>
-              </a:rPr>
-              <a:t>и </a:t>
-            </a:r>
-            <a:r>
-              <a:rPr lang="en-US" b="0" i="0" dirty="0">
-                <a:effectLst/>
-                <a:latin typeface="fkGroteskNeue"/>
-              </a:rPr>
-              <a:t>log(hazard) </a:t>
-            </a:r>
-            <a:r>
-              <a:rPr lang="ru-RU" b="0" i="0" dirty="0">
-                <a:effectLst/>
-                <a:latin typeface="fkGroteskNeue"/>
-              </a:rPr>
-              <a:t>должна быть линейной.</a:t>
-            </a:r>
-          </a:p>
-          <a:p>
-            <a:pPr algn="l"/>
-            <a:r>
-              <a:rPr lang="ru-RU" b="0" i="0" dirty="0">
-                <a:effectLst/>
-                <a:latin typeface="fkGroteskNeue"/>
-              </a:rPr>
-              <a:t>Проверка: </a:t>
-            </a:r>
-            <a:r>
-              <a:rPr lang="en-US" b="0" i="0" dirty="0">
-                <a:effectLst/>
-                <a:latin typeface="fkGroteskNeue"/>
-              </a:rPr>
-              <a:t>Martingale residuals. </a:t>
-            </a:r>
-            <a:r>
-              <a:rPr lang="ru-RU" b="0" i="0" dirty="0">
-                <a:effectLst/>
-                <a:latin typeface="fkGroteskNeue"/>
-              </a:rPr>
-              <a:t>Если есть нелинейный паттерн, трансформировать </a:t>
-            </a:r>
-            <a:r>
-              <a:rPr lang="en-US" b="0" i="0" dirty="0">
-                <a:effectLst/>
-                <a:latin typeface="fkGroteskNeue"/>
-              </a:rPr>
-              <a:t>X.</a:t>
-            </a:r>
-          </a:p>
-          <a:p>
             <a:endParaRPr lang="ru-RU" sz="1200" b="0" i="0" kern="1200" dirty="0">
               <a:solidFill>
                 <a:schemeClr val="tx1"/>
@@ -2270,249 +1088,10 @@
           <a:lstStyle/>
           <a:p>
             <a:pPr algn="l"/>
-            <a:r>
-              <a:rPr lang="ru-RU" b="0" i="0" dirty="0">
-                <a:effectLst/>
-                <a:latin typeface="fkGroteskNeue"/>
-              </a:rPr>
-              <a:t>Оценка качества модели:</a:t>
-            </a:r>
-          </a:p>
-          <a:p>
-            <a:pPr algn="l"/>
-            <a:r>
-              <a:rPr lang="ru-RU" b="0" i="0" dirty="0">
-                <a:effectLst/>
-                <a:latin typeface="fkGroteskNeue"/>
-              </a:rPr>
-              <a:t>C-</a:t>
-            </a:r>
-            <a:r>
-              <a:rPr lang="ru-RU" b="0" i="0" dirty="0" err="1">
-                <a:effectLst/>
-                <a:latin typeface="fkGroteskNeue"/>
-              </a:rPr>
-              <a:t>index</a:t>
-            </a:r>
-            <a:r>
-              <a:rPr lang="ru-RU" b="0" i="0" dirty="0">
-                <a:effectLst/>
-                <a:latin typeface="fkGroteskNeue"/>
-              </a:rPr>
-              <a:t> (</a:t>
-            </a:r>
-            <a:r>
-              <a:rPr lang="ru-RU" b="0" i="0" dirty="0" err="1">
-                <a:effectLst/>
-                <a:latin typeface="fkGroteskNeue"/>
-              </a:rPr>
-              <a:t>Concordance</a:t>
-            </a:r>
-            <a:r>
-              <a:rPr lang="ru-RU" b="0" i="0" dirty="0">
-                <a:effectLst/>
-                <a:latin typeface="fkGroteskNeue"/>
-              </a:rPr>
-              <a:t> Index):</a:t>
-            </a:r>
-          </a:p>
-          <a:p>
-            <a:pPr algn="l"/>
-            <a:r>
-              <a:rPr lang="ru-RU" b="0" i="0" dirty="0">
-                <a:effectLst/>
-                <a:latin typeface="fkGroteskNeue"/>
-              </a:rPr>
-              <a:t>Это вероятность того, что модель правильно ранжирует двух пациентов.</a:t>
-            </a:r>
-          </a:p>
-          <a:p>
-            <a:pPr algn="l"/>
-            <a:r>
-              <a:rPr lang="ru-RU" b="0" i="0" dirty="0">
-                <a:effectLst/>
-                <a:latin typeface="fkGroteskNeue"/>
-              </a:rPr>
-              <a:t>Если </a:t>
-            </a:r>
-            <a:r>
-              <a:rPr lang="ru-RU" b="0" i="0" dirty="0" err="1">
-                <a:effectLst/>
-                <a:latin typeface="fkGroteskNeue"/>
-              </a:rPr>
-              <a:t>patient</a:t>
-            </a:r>
-            <a:r>
-              <a:rPr lang="ru-RU" b="0" i="0" dirty="0">
-                <a:effectLst/>
-                <a:latin typeface="fkGroteskNeue"/>
-              </a:rPr>
-              <a:t> A имел событие раньше, чем </a:t>
-            </a:r>
-            <a:r>
-              <a:rPr lang="ru-RU" b="0" i="0" dirty="0" err="1">
-                <a:effectLst/>
-                <a:latin typeface="fkGroteskNeue"/>
-              </a:rPr>
-              <a:t>patient</a:t>
-            </a:r>
-            <a:r>
-              <a:rPr lang="ru-RU" b="0" i="0" dirty="0">
-                <a:effectLst/>
-                <a:latin typeface="fkGroteskNeue"/>
-              </a:rPr>
-              <a:t> B, предсказала ли модель, что A имеет выше </a:t>
-            </a:r>
-            <a:r>
-              <a:rPr lang="ru-RU" b="0" i="0" dirty="0" err="1">
-                <a:effectLst/>
-                <a:latin typeface="fkGroteskNeue"/>
-              </a:rPr>
-              <a:t>risk</a:t>
-            </a:r>
-            <a:r>
-              <a:rPr lang="ru-RU" b="0" i="0" dirty="0">
-                <a:effectLst/>
-                <a:latin typeface="fkGroteskNeue"/>
-              </a:rPr>
-              <a:t> </a:t>
-            </a:r>
-            <a:r>
-              <a:rPr lang="ru-RU" b="0" i="0" dirty="0" err="1">
-                <a:effectLst/>
-                <a:latin typeface="fkGroteskNeue"/>
-              </a:rPr>
-              <a:t>score</a:t>
-            </a:r>
-            <a:r>
-              <a:rPr lang="ru-RU" b="0" i="0" dirty="0">
-                <a:effectLst/>
-                <a:latin typeface="fkGroteskNeue"/>
-              </a:rPr>
-              <a:t>?</a:t>
-            </a:r>
-          </a:p>
-          <a:p>
-            <a:pPr algn="l"/>
-            <a:r>
-              <a:rPr lang="ru-RU" b="0" i="0" dirty="0">
-                <a:effectLst/>
-                <a:latin typeface="fkGroteskNeue"/>
-              </a:rPr>
-              <a:t>C-</a:t>
-            </a:r>
-            <a:r>
-              <a:rPr lang="ru-RU" b="0" i="0" dirty="0" err="1">
-                <a:effectLst/>
-                <a:latin typeface="fkGroteskNeue"/>
-              </a:rPr>
-              <a:t>index</a:t>
-            </a:r>
-            <a:r>
-              <a:rPr lang="ru-RU" b="0" i="0" dirty="0">
-                <a:effectLst/>
-                <a:latin typeface="fkGroteskNeue"/>
-              </a:rPr>
-              <a:t> от 0.5 (случайность) до 1.0 (идеально).</a:t>
-            </a:r>
-          </a:p>
-          <a:p>
-            <a:pPr algn="l"/>
-            <a:r>
-              <a:rPr lang="ru-RU" b="0" i="0" dirty="0">
-                <a:effectLst/>
-                <a:latin typeface="fkGroteskNeue"/>
-              </a:rPr>
-              <a:t>Интерпретация:</a:t>
-            </a:r>
-          </a:p>
-          <a:p>
-            <a:pPr algn="l">
-              <a:buFont typeface="Arial" panose="020B0604020202020204" pitchFamily="34" charset="0"/>
-              <a:buChar char="•"/>
-            </a:pPr>
-            <a:r>
-              <a:rPr lang="ru-RU" b="0" i="0" dirty="0">
-                <a:effectLst/>
-                <a:latin typeface="fkGroteskNeue"/>
-              </a:rPr>
-              <a:t>C = 0.5: случайно</a:t>
-            </a:r>
-          </a:p>
-          <a:p>
-            <a:pPr algn="l">
-              <a:buFont typeface="Arial" panose="020B0604020202020204" pitchFamily="34" charset="0"/>
-              <a:buChar char="•"/>
-            </a:pPr>
-            <a:r>
-              <a:rPr lang="ru-RU" b="0" i="0" dirty="0">
-                <a:effectLst/>
-                <a:latin typeface="fkGroteskNeue"/>
-              </a:rPr>
-              <a:t>C = 0.6: слабо</a:t>
-            </a:r>
-          </a:p>
-          <a:p>
-            <a:pPr algn="l">
-              <a:buFont typeface="Arial" panose="020B0604020202020204" pitchFamily="34" charset="0"/>
-              <a:buChar char="•"/>
-            </a:pPr>
-            <a:r>
-              <a:rPr lang="ru-RU" b="0" i="0" dirty="0">
-                <a:effectLst/>
-                <a:latin typeface="fkGroteskNeue"/>
-              </a:rPr>
-              <a:t>C = 0.7: хорошо</a:t>
-            </a:r>
-          </a:p>
-          <a:p>
-            <a:pPr algn="l">
-              <a:buFont typeface="Arial" panose="020B0604020202020204" pitchFamily="34" charset="0"/>
-              <a:buChar char="•"/>
-            </a:pPr>
-            <a:r>
-              <a:rPr lang="ru-RU" b="0" i="0" dirty="0">
-                <a:effectLst/>
-                <a:latin typeface="fkGroteskNeue"/>
-              </a:rPr>
-              <a:t>C = 0.75+: отлично</a:t>
-            </a:r>
-          </a:p>
-          <a:p>
-            <a:endParaRPr lang="ru-RU" sz="1200" b="0" i="0" kern="1200" dirty="0">
-              <a:solidFill>
-                <a:schemeClr val="tx1"/>
-              </a:solidFill>
-              <a:latin typeface="+mn-lt"/>
-              <a:ea typeface="+mn-ea"/>
-              <a:cs typeface="+mn-cs"/>
+            <a:endParaRPr lang="ru-RU" b="0" i="0" dirty="0">
+              <a:effectLst/>
+              <a:latin typeface="fkGroteskNeue"/>
             </a:endParaRPr>
-          </a:p>
-          <a:p>
-            <a:pPr marL="0" marR="0" lvl="0" indent="0" algn="l" defTabSz="914400" rtl="0" eaLnBrk="1" fontAlgn="auto" latinLnBrk="0" hangingPunct="1">
-              <a:lnSpc>
-                <a:spcPct val="100000"/>
-              </a:lnSpc>
-              <a:spcBef>
-                <a:spcPts val="0"/>
-              </a:spcBef>
-              <a:spcAft>
-                <a:spcPts val="0"/>
-              </a:spcAft>
-              <a:buClrTx/>
-              <a:buSzTx/>
-              <a:buFontTx/>
-              <a:buNone/>
-              <a:tabLst/>
-              <a:defRPr/>
-            </a:pPr>
-            <a:r>
-              <a:rPr lang="ru-RU" b="0" i="0" dirty="0">
-                <a:effectLst/>
-                <a:latin typeface="fkGroteskNeue"/>
-              </a:rPr>
-              <a:t>ПАУЗА</a:t>
-            </a:r>
           </a:p>
         </p:txBody>
       </p:sp>
@@ -2597,506 +1176,6 @@
           <a:bodyPr/>
           <a:lstStyle/>
           <a:p>
-            <a:pPr algn="l"/>
-            <a:r>
-              <a:rPr lang="ru-RU" b="0" i="0" dirty="0">
-                <a:solidFill>
-                  <a:srgbClr val="4D4D4C"/>
-                </a:solidFill>
-                <a:effectLst/>
-                <a:latin typeface="pplxSansMono"/>
-              </a:rPr>
-              <a:t>Теперь два важных концепта, которые часто забывают в анализе выживаемости: **</a:t>
-            </a:r>
-            <a:r>
-              <a:rPr lang="ru-RU" b="0" i="0" dirty="0" err="1">
-                <a:solidFill>
-                  <a:srgbClr val="4D4D4C"/>
-                </a:solidFill>
-                <a:effectLst/>
-                <a:latin typeface="pplxSansMono"/>
-              </a:rPr>
-              <a:t>confounding</a:t>
-            </a:r>
-            <a:r>
-              <a:rPr lang="ru-RU" b="0" i="0" dirty="0">
-                <a:solidFill>
-                  <a:srgbClr val="4D4D4C"/>
-                </a:solidFill>
-                <a:effectLst/>
-                <a:latin typeface="pplxSansMono"/>
-              </a:rPr>
-              <a:t> (путающая переменная)** и **</a:t>
-            </a:r>
-            <a:r>
-              <a:rPr lang="ru-RU" b="0" i="0" dirty="0" err="1">
-                <a:solidFill>
-                  <a:srgbClr val="4D4D4C"/>
-                </a:solidFill>
-                <a:effectLst/>
-                <a:latin typeface="pplxSansMono"/>
-              </a:rPr>
-              <a:t>interaction</a:t>
-            </a:r>
-            <a:r>
-              <a:rPr lang="ru-RU" b="0" i="0" dirty="0">
-                <a:solidFill>
-                  <a:srgbClr val="4D4D4C"/>
-                </a:solidFill>
-                <a:effectLst/>
-                <a:latin typeface="pplxSansMono"/>
-              </a:rPr>
-              <a:t> (взаимодействие)**. Разберём с примерами. **1. CONFOUNDING (путающая переменная)** Определение: переменная Z влияет **и** на экспозицию X, **и** на исход Y. Создаёт ложную связь между X и Y. **Пример**: Хотим оценить эффект размера опухоли (X) на смертность (Y). Но **возраст Z** влияет на размер опухоли (старше — чаще крупные) И на смертность (старше — хуже выживаемость). Результат: крупная опухоль кажется 'виноватой' в смерти, хотя на самом деле виноват возраст [web:182]. **Решение**: </a:t>
-            </a:r>
-            <a:r>
-              <a:rPr lang="ru-RU" b="0" i="0" dirty="0" err="1">
-                <a:solidFill>
-                  <a:srgbClr val="4D4D4C"/>
-                </a:solidFill>
-                <a:effectLst/>
-                <a:latin typeface="pplxSansMono"/>
-              </a:rPr>
-              <a:t>мультивариатная</a:t>
-            </a:r>
-            <a:r>
-              <a:rPr lang="ru-RU" b="0" i="0" dirty="0">
-                <a:solidFill>
-                  <a:srgbClr val="4D4D4C"/>
-                </a:solidFill>
-                <a:effectLst/>
-                <a:latin typeface="pplxSansMono"/>
-              </a:rPr>
-              <a:t> </a:t>
-            </a:r>
-            <a:r>
-              <a:rPr lang="ru-RU" b="0" i="0" dirty="0" err="1">
-                <a:solidFill>
-                  <a:srgbClr val="4D4D4C"/>
-                </a:solidFill>
-                <a:effectLst/>
-                <a:latin typeface="pplxSansMono"/>
-              </a:rPr>
-              <a:t>Cox</a:t>
-            </a:r>
-            <a:r>
-              <a:rPr lang="ru-RU" b="0" i="0" dirty="0">
-                <a:solidFill>
-                  <a:srgbClr val="4D4D4C"/>
-                </a:solidFill>
-                <a:effectLst/>
-                <a:latin typeface="pplxSansMono"/>
-              </a:rPr>
-              <a:t> с контролем Z: h(</a:t>
-            </a:r>
-            <a:r>
-              <a:rPr lang="ru-RU" b="0" i="0" dirty="0" err="1">
-                <a:solidFill>
-                  <a:srgbClr val="4D4D4C"/>
-                </a:solidFill>
-                <a:effectLst/>
-                <a:latin typeface="pplxSansMono"/>
-              </a:rPr>
-              <a:t>t|X,Z</a:t>
-            </a:r>
-            <a:r>
-              <a:rPr lang="ru-RU" b="0" i="0" dirty="0">
-                <a:solidFill>
-                  <a:srgbClr val="4D4D4C"/>
-                </a:solidFill>
-                <a:effectLst/>
-                <a:latin typeface="pplxSansMono"/>
-              </a:rPr>
-              <a:t>) = h0(t) × </a:t>
-            </a:r>
-            <a:r>
-              <a:rPr lang="ru-RU" b="0" i="0" dirty="0" err="1">
-                <a:solidFill>
-                  <a:srgbClr val="4D4D4C"/>
-                </a:solidFill>
-                <a:effectLst/>
-                <a:latin typeface="pplxSansMono"/>
-              </a:rPr>
-              <a:t>exp</a:t>
-            </a:r>
-            <a:r>
-              <a:rPr lang="ru-RU" b="0" i="0" dirty="0">
-                <a:solidFill>
-                  <a:srgbClr val="4D4D4C"/>
-                </a:solidFill>
-                <a:effectLst/>
-                <a:latin typeface="pplxSansMono"/>
-              </a:rPr>
-              <a:t>(β1 X + β2 Z). Эффект X теперь **независимый от Z** [web:182]. **2. INTERACTION (взаимодействие)** Определение: эффект X на Y **зависит** от уровня Z. **Пример**: ER+ статус (X) </a:t>
-            </a:r>
-            <a:r>
-              <a:rPr lang="ru-RU" b="0" i="0" dirty="0" err="1">
-                <a:solidFill>
-                  <a:srgbClr val="4D4D4C"/>
-                </a:solidFill>
-                <a:effectLst/>
-                <a:latin typeface="pplxSansMono"/>
-              </a:rPr>
-              <a:t>протективен</a:t>
-            </a:r>
-            <a:r>
-              <a:rPr lang="ru-RU" b="0" i="0" dirty="0">
-                <a:solidFill>
-                  <a:srgbClr val="4D4D4C"/>
-                </a:solidFill>
-                <a:effectLst/>
-                <a:latin typeface="pplxSansMono"/>
-              </a:rPr>
-              <a:t> (HR&lt;1) **только у молодых** (Z&lt;50 лет), у пожилых — нейтрален или вреден. Причина: гормональная терапия эффективна только при активном метаболизме [web:187]. **Решение**: добавить **</a:t>
-            </a:r>
-            <a:r>
-              <a:rPr lang="ru-RU" b="0" i="0" dirty="0" err="1">
-                <a:solidFill>
-                  <a:srgbClr val="4D4D4C"/>
-                </a:solidFill>
-                <a:effectLst/>
-                <a:latin typeface="pplxSansMono"/>
-              </a:rPr>
-              <a:t>interaction</a:t>
-            </a:r>
-            <a:r>
-              <a:rPr lang="ru-RU" b="0" i="0" dirty="0">
-                <a:solidFill>
-                  <a:srgbClr val="4D4D4C"/>
-                </a:solidFill>
-                <a:effectLst/>
-                <a:latin typeface="pplxSansMono"/>
-              </a:rPr>
-              <a:t> </a:t>
-            </a:r>
-            <a:r>
-              <a:rPr lang="ru-RU" b="0" i="0" dirty="0" err="1">
-                <a:solidFill>
-                  <a:srgbClr val="4D4D4C"/>
-                </a:solidFill>
-                <a:effectLst/>
-                <a:latin typeface="pplxSansMono"/>
-              </a:rPr>
-              <a:t>term</a:t>
-            </a:r>
-            <a:r>
-              <a:rPr lang="ru-RU" b="0" i="0" dirty="0">
-                <a:solidFill>
-                  <a:srgbClr val="4D4D4C"/>
-                </a:solidFill>
-                <a:effectLst/>
-                <a:latin typeface="pplxSansMono"/>
-              </a:rPr>
-              <a:t>** в модель: h(</a:t>
-            </a:r>
-            <a:r>
-              <a:rPr lang="ru-RU" b="0" i="0" dirty="0" err="1">
-                <a:solidFill>
-                  <a:srgbClr val="4D4D4C"/>
-                </a:solidFill>
-                <a:effectLst/>
-                <a:latin typeface="pplxSansMono"/>
-              </a:rPr>
-              <a:t>t|X,Z</a:t>
-            </a:r>
-            <a:r>
-              <a:rPr lang="ru-RU" b="0" i="0" dirty="0">
-                <a:solidFill>
-                  <a:srgbClr val="4D4D4C"/>
-                </a:solidFill>
-                <a:effectLst/>
-                <a:latin typeface="pplxSansMono"/>
-              </a:rPr>
-              <a:t>) = h0(t) × </a:t>
-            </a:r>
-            <a:r>
-              <a:rPr lang="ru-RU" b="0" i="0" dirty="0" err="1">
-                <a:solidFill>
-                  <a:srgbClr val="4D4D4C"/>
-                </a:solidFill>
-                <a:effectLst/>
-                <a:latin typeface="pplxSansMono"/>
-              </a:rPr>
-              <a:t>exp</a:t>
-            </a:r>
-            <a:r>
-              <a:rPr lang="ru-RU" b="0" i="0" dirty="0">
-                <a:solidFill>
-                  <a:srgbClr val="4D4D4C"/>
-                </a:solidFill>
-                <a:effectLst/>
-                <a:latin typeface="pplxSansMono"/>
-              </a:rPr>
-              <a:t>(β1 X + β2 Z + **β3 X×Z**). Тест значимости β3 — тест на взаимодействие. [пауза 3 сек, показать формулы крупно] **Практика**: в R `</a:t>
-            </a:r>
-            <a:r>
-              <a:rPr lang="ru-RU" b="0" i="0" dirty="0" err="1">
-                <a:solidFill>
-                  <a:srgbClr val="4D4D4C"/>
-                </a:solidFill>
-                <a:effectLst/>
-                <a:latin typeface="pplxSansMono"/>
-              </a:rPr>
-              <a:t>coxph</a:t>
-            </a:r>
-            <a:r>
-              <a:rPr lang="ru-RU" b="0" i="0" dirty="0">
-                <a:solidFill>
-                  <a:srgbClr val="4D4D4C"/>
-                </a:solidFill>
-                <a:effectLst/>
-                <a:latin typeface="pplxSansMono"/>
-              </a:rPr>
-              <a:t>(</a:t>
-            </a:r>
-            <a:r>
-              <a:rPr lang="ru-RU" b="0" i="0" dirty="0" err="1">
-                <a:solidFill>
-                  <a:srgbClr val="4D4D4C"/>
-                </a:solidFill>
-                <a:effectLst/>
-                <a:latin typeface="pplxSansMono"/>
-              </a:rPr>
-              <a:t>Surv</a:t>
-            </a:r>
-            <a:r>
-              <a:rPr lang="ru-RU" b="0" i="0" dirty="0">
-                <a:solidFill>
-                  <a:srgbClr val="4D4D4C"/>
-                </a:solidFill>
-                <a:effectLst/>
-                <a:latin typeface="pplxSansMono"/>
-              </a:rPr>
-              <a:t>(</a:t>
-            </a:r>
-            <a:r>
-              <a:rPr lang="ru-RU" b="0" i="0" dirty="0" err="1">
-                <a:solidFill>
-                  <a:srgbClr val="4D4D4C"/>
-                </a:solidFill>
-                <a:effectLst/>
-                <a:latin typeface="pplxSansMono"/>
-              </a:rPr>
-              <a:t>time,status</a:t>
-            </a:r>
-            <a:r>
-              <a:rPr lang="ru-RU" b="0" i="0" dirty="0">
-                <a:solidFill>
-                  <a:srgbClr val="4D4D4C"/>
-                </a:solidFill>
-                <a:effectLst/>
-                <a:latin typeface="pplxSansMono"/>
-              </a:rPr>
-              <a:t>) ~ </a:t>
-            </a:r>
-            <a:r>
-              <a:rPr lang="ru-RU" b="0" i="0" dirty="0" err="1">
-                <a:solidFill>
-                  <a:srgbClr val="4D4D4C"/>
-                </a:solidFill>
-                <a:effectLst/>
-                <a:latin typeface="pplxSansMono"/>
-              </a:rPr>
-              <a:t>size</a:t>
-            </a:r>
-            <a:r>
-              <a:rPr lang="ru-RU" b="0" i="0" dirty="0">
-                <a:solidFill>
-                  <a:srgbClr val="4D4D4C"/>
-                </a:solidFill>
-                <a:effectLst/>
-                <a:latin typeface="pplxSansMono"/>
-              </a:rPr>
-              <a:t> + </a:t>
-            </a:r>
-            <a:r>
-              <a:rPr lang="ru-RU" b="0" i="0" dirty="0" err="1">
-                <a:solidFill>
-                  <a:srgbClr val="4D4D4C"/>
-                </a:solidFill>
-                <a:effectLst/>
-                <a:latin typeface="pplxSansMono"/>
-              </a:rPr>
-              <a:t>age</a:t>
-            </a:r>
-            <a:r>
-              <a:rPr lang="ru-RU" b="0" i="0" dirty="0">
-                <a:solidFill>
-                  <a:srgbClr val="4D4D4C"/>
-                </a:solidFill>
-                <a:effectLst/>
-                <a:latin typeface="pplxSansMono"/>
-              </a:rPr>
-              <a:t> + </a:t>
-            </a:r>
-            <a:r>
-              <a:rPr lang="ru-RU" b="0" i="0" dirty="0" err="1">
-                <a:solidFill>
-                  <a:srgbClr val="4D4D4C"/>
-                </a:solidFill>
-                <a:effectLst/>
-                <a:latin typeface="pplxSansMono"/>
-              </a:rPr>
-              <a:t>size</a:t>
-            </a:r>
-            <a:r>
-              <a:rPr lang="ru-RU" b="0" i="0" dirty="0">
-                <a:solidFill>
-                  <a:srgbClr val="4D4D4C"/>
-                </a:solidFill>
-                <a:effectLst/>
-                <a:latin typeface="pplxSansMono"/>
-              </a:rPr>
-              <a:t>*</a:t>
-            </a:r>
-            <a:r>
-              <a:rPr lang="ru-RU" b="0" i="0" dirty="0" err="1">
-                <a:solidFill>
-                  <a:srgbClr val="4D4D4C"/>
-                </a:solidFill>
-                <a:effectLst/>
-                <a:latin typeface="pplxSansMono"/>
-              </a:rPr>
-              <a:t>age</a:t>
-            </a:r>
-            <a:r>
-              <a:rPr lang="ru-RU" b="0" i="0" dirty="0">
-                <a:solidFill>
-                  <a:srgbClr val="4D4D4C"/>
-                </a:solidFill>
-                <a:effectLst/>
-                <a:latin typeface="pplxSansMono"/>
-              </a:rPr>
-              <a:t>, </a:t>
-            </a:r>
-            <a:r>
-              <a:rPr lang="ru-RU" b="0" i="0" dirty="0" err="1">
-                <a:solidFill>
-                  <a:srgbClr val="4D4D4C"/>
-                </a:solidFill>
-                <a:effectLst/>
-                <a:latin typeface="pplxSansMono"/>
-              </a:rPr>
-              <a:t>data</a:t>
-            </a:r>
-            <a:r>
-              <a:rPr lang="ru-RU" b="0" i="0" dirty="0">
-                <a:solidFill>
-                  <a:srgbClr val="4D4D4C"/>
-                </a:solidFill>
-                <a:effectLst/>
-                <a:latin typeface="pplxSansMono"/>
-              </a:rPr>
-              <a:t>)`. Если β3 значимо — рисуем **</a:t>
-            </a:r>
-            <a:r>
-              <a:rPr lang="ru-RU" b="0" i="0" dirty="0" err="1">
-                <a:solidFill>
-                  <a:srgbClr val="4D4D4C"/>
-                </a:solidFill>
-                <a:effectLst/>
-                <a:latin typeface="pplxSansMono"/>
-              </a:rPr>
-              <a:t>stratified</a:t>
-            </a:r>
-            <a:r>
-              <a:rPr lang="ru-RU" b="0" i="0" dirty="0">
-                <a:solidFill>
-                  <a:srgbClr val="4D4D4C"/>
-                </a:solidFill>
-                <a:effectLst/>
-                <a:latin typeface="pplxSansMono"/>
-              </a:rPr>
-              <a:t> KM** или **</a:t>
-            </a:r>
-            <a:r>
-              <a:rPr lang="ru-RU" b="0" i="0" dirty="0" err="1">
-                <a:solidFill>
-                  <a:srgbClr val="4D4D4C"/>
-                </a:solidFill>
-                <a:effectLst/>
-                <a:latin typeface="pplxSansMono"/>
-              </a:rPr>
-              <a:t>time‑dependent</a:t>
-            </a:r>
-            <a:r>
-              <a:rPr lang="ru-RU" b="0" i="0" dirty="0">
-                <a:solidFill>
-                  <a:srgbClr val="4D4D4C"/>
-                </a:solidFill>
-                <a:effectLst/>
-                <a:latin typeface="pplxSansMono"/>
-              </a:rPr>
-              <a:t> HR**. **Вывод**: всегда проверяйте </a:t>
-            </a:r>
-            <a:r>
-              <a:rPr lang="ru-RU" b="0" i="0" dirty="0" err="1">
-                <a:solidFill>
-                  <a:srgbClr val="4D4D4C"/>
-                </a:solidFill>
-                <a:effectLst/>
-                <a:latin typeface="pplxSansMono"/>
-              </a:rPr>
-              <a:t>confounding</a:t>
-            </a:r>
-            <a:r>
-              <a:rPr lang="ru-RU" b="0" i="0" dirty="0">
-                <a:solidFill>
-                  <a:srgbClr val="4D4D4C"/>
-                </a:solidFill>
-                <a:effectLst/>
-                <a:latin typeface="pplxSansMono"/>
-              </a:rPr>
-              <a:t> (</a:t>
-            </a:r>
-            <a:r>
-              <a:rPr lang="ru-RU" b="0" i="0" dirty="0" err="1">
-                <a:solidFill>
-                  <a:srgbClr val="4D4D4C"/>
-                </a:solidFill>
-                <a:effectLst/>
-                <a:latin typeface="pplxSansMono"/>
-              </a:rPr>
-              <a:t>мультивариатная</a:t>
-            </a:r>
-            <a:r>
-              <a:rPr lang="ru-RU" b="0" i="0" dirty="0">
-                <a:solidFill>
-                  <a:srgbClr val="4D4D4C"/>
-                </a:solidFill>
-                <a:effectLst/>
-                <a:latin typeface="pplxSansMono"/>
-              </a:rPr>
-              <a:t> модель) и </a:t>
-            </a:r>
-            <a:r>
-              <a:rPr lang="ru-RU" b="0" i="0" dirty="0" err="1">
-                <a:solidFill>
-                  <a:srgbClr val="4D4D4C"/>
-                </a:solidFill>
-                <a:effectLst/>
-                <a:latin typeface="pplxSansMono"/>
-              </a:rPr>
-              <a:t>interaction</a:t>
-            </a:r>
-            <a:r>
-              <a:rPr lang="ru-RU" b="0" i="0" dirty="0">
-                <a:solidFill>
-                  <a:srgbClr val="4D4D4C"/>
-                </a:solidFill>
-                <a:effectLst/>
-                <a:latin typeface="pplxSansMono"/>
-              </a:rPr>
-              <a:t> (тест β3). Иначе выводы ошибочны!</a:t>
-            </a:r>
-          </a:p>
-          <a:p>
-            <a:pPr algn="l"/>
-            <a:endParaRPr lang="ru-RU" b="0" i="0" dirty="0">
-              <a:effectLst/>
-              <a:latin typeface="fkGroteskNeue"/>
-            </a:endParaRPr>
-          </a:p>
-          <a:p>
             <a:endParaRPr lang="ru-RU" sz="1200" b="0" i="0" kern="1200" dirty="0">
               <a:solidFill>
                 <a:schemeClr val="tx1"/>
@@ -3190,116 +1269,6 @@
           <a:lstStyle/>
           <a:p>
             <a:pPr algn="l"/>
-            <a:r>
-              <a:rPr lang="ru-RU" b="0" i="0" dirty="0">
-                <a:solidFill>
-                  <a:srgbClr val="4D4D4C"/>
-                </a:solidFill>
-                <a:effectLst/>
-                <a:latin typeface="pplxSansMono"/>
-              </a:rPr>
-              <a:t>Классический пример из онкологии — статья по 2652 пациенткам с раком груди.[web:197] Если сделать </a:t>
-            </a:r>
-            <a:r>
-              <a:rPr lang="ru-RU" b="0" i="0" dirty="0" err="1">
-                <a:solidFill>
-                  <a:srgbClr val="4D4D4C"/>
-                </a:solidFill>
-                <a:effectLst/>
-                <a:latin typeface="pplxSansMono"/>
-              </a:rPr>
-              <a:t>univariate</a:t>
-            </a:r>
-            <a:r>
-              <a:rPr lang="ru-RU" b="0" i="0" dirty="0">
-                <a:solidFill>
-                  <a:srgbClr val="4D4D4C"/>
-                </a:solidFill>
-                <a:effectLst/>
-                <a:latin typeface="pplxSansMono"/>
-              </a:rPr>
-              <a:t> </a:t>
-            </a:r>
-            <a:r>
-              <a:rPr lang="ru-RU" b="0" i="0" dirty="0" err="1">
-                <a:solidFill>
-                  <a:srgbClr val="4D4D4C"/>
-                </a:solidFill>
-                <a:effectLst/>
-                <a:latin typeface="pplxSansMono"/>
-              </a:rPr>
-              <a:t>Cox</a:t>
-            </a:r>
-            <a:r>
-              <a:rPr lang="ru-RU" b="0" i="0" dirty="0">
-                <a:solidFill>
-                  <a:srgbClr val="4D4D4C"/>
-                </a:solidFill>
-                <a:effectLst/>
-                <a:latin typeface="pplxSansMono"/>
-              </a:rPr>
-              <a:t> только по размеру опухоли, T3/T4 покажут HR~2.5 — 'крупная опухоль = плохо'. Но возраст — **путающая переменная**: у пожилых чаще крупные опухоли И хуже выживаемость. В </a:t>
-            </a:r>
-            <a:r>
-              <a:rPr lang="ru-RU" b="0" i="0" dirty="0" err="1">
-                <a:solidFill>
-                  <a:srgbClr val="4D4D4C"/>
-                </a:solidFill>
-                <a:effectLst/>
-                <a:latin typeface="pplxSansMono"/>
-              </a:rPr>
-              <a:t>мультивариатной</a:t>
-            </a:r>
-            <a:r>
-              <a:rPr lang="ru-RU" b="0" i="0" dirty="0">
-                <a:solidFill>
-                  <a:srgbClr val="4D4D4C"/>
-                </a:solidFill>
-                <a:effectLst/>
-                <a:latin typeface="pplxSansMono"/>
-              </a:rPr>
-              <a:t> модели с контролем возраста HR T3 падает до 1.93 — реальный эффект размера меньше![web:197] Вывод: всегда </a:t>
-            </a:r>
-            <a:r>
-              <a:rPr lang="ru-RU" b="0" i="0" dirty="0" err="1">
-                <a:solidFill>
-                  <a:srgbClr val="4D4D4C"/>
-                </a:solidFill>
-                <a:effectLst/>
-                <a:latin typeface="pplxSansMono"/>
-              </a:rPr>
-              <a:t>мультивариатная</a:t>
-            </a:r>
-            <a:r>
-              <a:rPr lang="ru-RU" b="0" i="0" dirty="0">
-                <a:solidFill>
-                  <a:srgbClr val="4D4D4C"/>
-                </a:solidFill>
-                <a:effectLst/>
-                <a:latin typeface="pplxSansMono"/>
-              </a:rPr>
-              <a:t> </a:t>
-            </a:r>
-            <a:r>
-              <a:rPr lang="ru-RU" b="0" i="0" dirty="0" err="1">
-                <a:solidFill>
-                  <a:srgbClr val="4D4D4C"/>
-                </a:solidFill>
-                <a:effectLst/>
-                <a:latin typeface="pplxSansMono"/>
-              </a:rPr>
-              <a:t>Cox</a:t>
-            </a:r>
-            <a:r>
-              <a:rPr lang="ru-RU" b="0" i="0" dirty="0">
-                <a:solidFill>
-                  <a:srgbClr val="4D4D4C"/>
-                </a:solidFill>
-                <a:effectLst/>
-                <a:latin typeface="pplxSansMono"/>
-              </a:rPr>
-              <a:t>, иначе выводы искажены.</a:t>
-            </a:r>
             <a:endParaRPr lang="ru-RU" sz="1200" b="0" i="0" kern="1200" dirty="0">
               <a:solidFill>
                 <a:schemeClr val="tx1"/>
@@ -3392,217 +1361,6 @@
           <a:bodyPr/>
           <a:lstStyle/>
           <a:p>
-            <a:pPr algn="l"/>
-            <a:r>
-              <a:rPr lang="ru-RU" b="0" i="0" dirty="0">
-                <a:effectLst/>
-                <a:latin typeface="fkGroteskNeue"/>
-              </a:rPr>
-              <a:t>Конкурирующие риски (</a:t>
-            </a:r>
-            <a:r>
-              <a:rPr lang="ru-RU" b="0" i="0" dirty="0" err="1">
-                <a:effectLst/>
-                <a:latin typeface="fkGroteskNeue"/>
-              </a:rPr>
-              <a:t>Competing</a:t>
-            </a:r>
-            <a:r>
-              <a:rPr lang="ru-RU" b="0" i="0" dirty="0">
-                <a:effectLst/>
-                <a:latin typeface="fkGroteskNeue"/>
-              </a:rPr>
-              <a:t> </a:t>
-            </a:r>
-            <a:r>
-              <a:rPr lang="ru-RU" b="0" i="0" dirty="0" err="1">
-                <a:effectLst/>
-                <a:latin typeface="fkGroteskNeue"/>
-              </a:rPr>
-              <a:t>Risks</a:t>
-            </a:r>
-            <a:r>
-              <a:rPr lang="ru-RU" b="0" i="0" dirty="0">
-                <a:effectLst/>
-                <a:latin typeface="fkGroteskNeue"/>
-              </a:rPr>
-              <a:t>):</a:t>
-            </a:r>
-          </a:p>
-          <a:p>
-            <a:pPr algn="l"/>
-            <a:r>
-              <a:rPr lang="ru-RU" b="0" i="0" dirty="0">
-                <a:effectLst/>
-                <a:latin typeface="fkGroteskNeue"/>
-              </a:rPr>
-              <a:t>Пациент может умереть от:</a:t>
-            </a:r>
-          </a:p>
-          <a:p>
-            <a:pPr algn="l">
-              <a:buFont typeface="Arial" panose="020B0604020202020204" pitchFamily="34" charset="0"/>
-              <a:buChar char="•"/>
-            </a:pPr>
-            <a:r>
-              <a:rPr lang="ru-RU" b="0" i="0" dirty="0">
-                <a:effectLst/>
-                <a:latin typeface="fkGroteskNeue"/>
-              </a:rPr>
-              <a:t>Рака (интересует нас)</a:t>
-            </a:r>
-          </a:p>
-          <a:p>
-            <a:pPr algn="l">
-              <a:buFont typeface="Arial" panose="020B0604020202020204" pitchFamily="34" charset="0"/>
-              <a:buChar char="•"/>
-            </a:pPr>
-            <a:r>
-              <a:rPr lang="ru-RU" b="0" i="0" dirty="0">
-                <a:effectLst/>
-                <a:latin typeface="fkGroteskNeue"/>
-              </a:rPr>
-              <a:t>Инфаркта</a:t>
-            </a:r>
-          </a:p>
-          <a:p>
-            <a:pPr algn="l">
-              <a:buFont typeface="Arial" panose="020B0604020202020204" pitchFamily="34" charset="0"/>
-              <a:buChar char="•"/>
-            </a:pPr>
-            <a:r>
-              <a:rPr lang="ru-RU" b="0" i="0" dirty="0">
-                <a:effectLst/>
-                <a:latin typeface="fkGroteskNeue"/>
-              </a:rPr>
-              <a:t>ДТП</a:t>
-            </a:r>
-          </a:p>
-          <a:p>
-            <a:pPr algn="l"/>
-            <a:r>
-              <a:rPr lang="ru-RU" b="0" i="0" dirty="0">
-                <a:effectLst/>
-                <a:latin typeface="fkGroteskNeue"/>
-              </a:rPr>
-              <a:t>Стандартный </a:t>
-            </a:r>
-            <a:r>
-              <a:rPr lang="ru-RU" b="0" i="0" dirty="0" err="1">
-                <a:effectLst/>
-                <a:latin typeface="fkGroteskNeue"/>
-              </a:rPr>
-              <a:t>Cox</a:t>
-            </a:r>
-            <a:r>
-              <a:rPr lang="ru-RU" b="0" i="0" dirty="0">
-                <a:effectLst/>
-                <a:latin typeface="fkGroteskNeue"/>
-              </a:rPr>
-              <a:t> рассматривает любое событие. Но это может быть неправильно.</a:t>
-            </a:r>
-          </a:p>
-          <a:p>
-            <a:pPr algn="l"/>
-            <a:r>
-              <a:rPr lang="ru-RU" b="0" i="0" dirty="0">
-                <a:effectLst/>
-                <a:latin typeface="fkGroteskNeue"/>
-              </a:rPr>
-              <a:t>Например, если лечение вызывает инфаркты, мы можем не видеть </a:t>
-            </a:r>
-            <a:r>
-              <a:rPr lang="ru-RU" b="0" i="0" dirty="0" err="1">
-                <a:effectLst/>
-                <a:latin typeface="fkGroteskNeue"/>
-              </a:rPr>
-              <a:t>this</a:t>
-            </a:r>
-            <a:r>
-              <a:rPr lang="ru-RU" b="0" i="0" dirty="0">
-                <a:effectLst/>
-                <a:latin typeface="fkGroteskNeue"/>
-              </a:rPr>
-              <a:t> в </a:t>
-            </a:r>
-            <a:r>
-              <a:rPr lang="ru-RU" b="0" i="0" dirty="0" err="1">
-                <a:effectLst/>
-                <a:latin typeface="fkGroteskNeue"/>
-              </a:rPr>
-              <a:t>death-from-cancer</a:t>
-            </a:r>
-            <a:r>
-              <a:rPr lang="ru-RU" b="0" i="0" dirty="0">
-                <a:effectLst/>
-                <a:latin typeface="fkGroteskNeue"/>
-              </a:rPr>
-              <a:t> кривой.</a:t>
-            </a:r>
-          </a:p>
-          <a:p>
-            <a:pPr algn="l"/>
-            <a:r>
-              <a:rPr lang="ru-RU" b="0" i="0" dirty="0">
-                <a:effectLst/>
-                <a:latin typeface="fkGroteskNeue"/>
-              </a:rPr>
-              <a:t>Подход: использовать Fine-</a:t>
-            </a:r>
-            <a:r>
-              <a:rPr lang="ru-RU" b="0" i="0" dirty="0" err="1">
-                <a:effectLst/>
-                <a:latin typeface="fkGroteskNeue"/>
-              </a:rPr>
-              <a:t>Gray</a:t>
-            </a:r>
-            <a:r>
-              <a:rPr lang="ru-RU" b="0" i="0" dirty="0">
-                <a:effectLst/>
-                <a:latin typeface="fkGroteskNeue"/>
-              </a:rPr>
-              <a:t> </a:t>
-            </a:r>
-            <a:r>
-              <a:rPr lang="ru-RU" b="0" i="0" dirty="0" err="1">
-                <a:effectLst/>
-                <a:latin typeface="fkGroteskNeue"/>
-              </a:rPr>
-              <a:t>model</a:t>
-            </a:r>
-            <a:r>
-              <a:rPr lang="ru-RU" b="0" i="0" dirty="0">
-                <a:effectLst/>
-                <a:latin typeface="fkGroteskNeue"/>
-              </a:rPr>
-              <a:t> или непараметрический </a:t>
-            </a:r>
-            <a:r>
-              <a:rPr lang="ru-RU" b="0" i="0" dirty="0" err="1">
-                <a:effectLst/>
-                <a:latin typeface="fkGroteskNeue"/>
-              </a:rPr>
-              <a:t>estimator</a:t>
-            </a:r>
-            <a:r>
-              <a:rPr lang="ru-RU" b="0" i="0" dirty="0">
-                <a:effectLst/>
-                <a:latin typeface="fkGroteskNeue"/>
-              </a:rPr>
-              <a:t>.</a:t>
-            </a:r>
-          </a:p>
-          <a:p>
-            <a:endParaRPr lang="ru-RU" sz="1200" b="0" i="0" kern="1200" dirty="0">
-              <a:solidFill>
-                <a:schemeClr val="tx1"/>
-              </a:solidFill>
-              <a:latin typeface="+mn-lt"/>
-              <a:ea typeface="+mn-ea"/>
-              <a:cs typeface="+mn-cs"/>
-            </a:endParaRPr>
-          </a:p>
-          <a:p>
             <a:endParaRPr lang="ru-RU" sz="1200" b="0" i="0" kern="1200" dirty="0">
               <a:solidFill>
                 <a:schemeClr val="tx1"/>
@@ -3696,107 +1454,6 @@
           <a:lstStyle/>
           <a:p>
             <a:pPr algn="l"/>
-            <a:r>
-              <a:rPr lang="ru-RU" b="0" i="0" dirty="0">
-                <a:effectLst/>
-                <a:latin typeface="pplxSerif"/>
-              </a:rPr>
-              <a:t>У пациенток с раком молочной железы при хорошем контроле опухоли возрастает доля смертей от сердечно‑сосудистых причин и других нераковых событий. Если мы просто цензурируем их в стандартной </a:t>
-            </a:r>
-            <a:r>
-              <a:rPr lang="ru-RU" b="0" i="0" dirty="0" err="1">
-                <a:effectLst/>
-                <a:latin typeface="pplxSerif"/>
-              </a:rPr>
-              <a:t>Cox</a:t>
-            </a:r>
-            <a:r>
-              <a:rPr lang="ru-RU" b="0" i="0" dirty="0">
-                <a:effectLst/>
-                <a:latin typeface="pplxSerif"/>
-              </a:rPr>
-              <a:t>‑модели по раковой смертности, то фактически притворяемся, что они могли бы позже умереть от рака — это приводит к завышению расчётного риска.</a:t>
-            </a:r>
-            <a:br>
-              <a:rPr lang="ru-RU" dirty="0"/>
-            </a:br>
-            <a:r>
-              <a:rPr lang="ru-RU" b="0" i="0" dirty="0">
-                <a:effectLst/>
-                <a:latin typeface="pplxSerif"/>
-              </a:rPr>
-              <a:t>Модели </a:t>
-            </a:r>
-            <a:r>
-              <a:rPr lang="ru-RU" b="0" i="0" dirty="0" err="1">
-                <a:effectLst/>
-                <a:latin typeface="pplxSerif"/>
-              </a:rPr>
-              <a:t>competing</a:t>
-            </a:r>
-            <a:r>
-              <a:rPr lang="ru-RU" b="0" i="0" dirty="0">
-                <a:effectLst/>
-                <a:latin typeface="pplxSerif"/>
-              </a:rPr>
-              <a:t> </a:t>
-            </a:r>
-            <a:r>
-              <a:rPr lang="ru-RU" b="0" i="0" dirty="0" err="1">
-                <a:effectLst/>
-                <a:latin typeface="pplxSerif"/>
-              </a:rPr>
-              <a:t>risks</a:t>
-            </a:r>
-            <a:r>
-              <a:rPr lang="ru-RU" b="0" i="0" dirty="0">
-                <a:effectLst/>
-                <a:latin typeface="pplxSerif"/>
-              </a:rPr>
-              <a:t> — </a:t>
-            </a:r>
-            <a:r>
-              <a:rPr lang="ru-RU" b="0" i="0" dirty="0" err="1">
-                <a:effectLst/>
-                <a:latin typeface="pplxSerif"/>
-              </a:rPr>
-              <a:t>cause‑specific</a:t>
-            </a:r>
-            <a:r>
-              <a:rPr lang="ru-RU" b="0" i="0" dirty="0">
-                <a:effectLst/>
-                <a:latin typeface="pplxSerif"/>
-              </a:rPr>
-              <a:t> </a:t>
-            </a:r>
-            <a:r>
-              <a:rPr lang="ru-RU" b="0" i="0" dirty="0" err="1">
-                <a:effectLst/>
-                <a:latin typeface="pplxSerif"/>
-              </a:rPr>
-              <a:t>Cox</a:t>
-            </a:r>
-            <a:r>
-              <a:rPr lang="ru-RU" b="0" i="0" dirty="0">
-                <a:effectLst/>
-                <a:latin typeface="pplxSerif"/>
-              </a:rPr>
-              <a:t> или Fine–</a:t>
-            </a:r>
-            <a:r>
-              <a:rPr lang="ru-RU" b="0" i="0" dirty="0" err="1">
-                <a:effectLst/>
-                <a:latin typeface="pplxSerif"/>
-              </a:rPr>
-              <a:t>Gray</a:t>
-            </a:r>
-            <a:r>
-              <a:rPr lang="ru-RU" b="0" i="0" dirty="0">
-                <a:effectLst/>
-                <a:latin typeface="pplxSerif"/>
-              </a:rPr>
-              <a:t> — учитывают, что наступление конкурирующего события “выводит” пациентку из риска умереть от рака. Это даёт более реалистичную кумулятивную вероятность раковой и кардиоваскулярной смертности одновременно.</a:t>
-            </a:r>
             <a:endParaRPr lang="ru-RU" sz="1200" b="0" i="0" kern="1200" dirty="0">
               <a:solidFill>
                 <a:schemeClr val="tx1"/>
@@ -3890,82 +1547,10 @@
           <a:lstStyle/>
           <a:p>
             <a:pPr algn="l"/>
-            <a:r>
-              <a:rPr lang="ru-RU" b="0" i="0" dirty="0">
-                <a:effectLst/>
-                <a:latin typeface="fkGroteskNeue"/>
-              </a:rPr>
-              <a:t>На лекциях 1-2 мы предсказывали классы: болен или здоров, рецидив или нет.</a:t>
-            </a:r>
-          </a:p>
-          <a:p>
-            <a:pPr algn="l"/>
-            <a:r>
-              <a:rPr lang="ru-RU" b="0" i="0" dirty="0">
-                <a:effectLst/>
-                <a:latin typeface="fkGroteskNeue"/>
-              </a:rPr>
-              <a:t>Но в медицине часто нужно ответить на другой вопрос: когда произойдёт событие?</a:t>
-            </a:r>
-          </a:p>
-          <a:p>
-            <a:pPr algn="l"/>
-            <a:r>
-              <a:rPr lang="ru-RU" b="0" i="0" dirty="0">
-                <a:effectLst/>
-                <a:latin typeface="fkGroteskNeue"/>
-              </a:rPr>
-              <a:t>Примеры:</a:t>
-            </a:r>
-          </a:p>
-          <a:p>
-            <a:pPr algn="l">
-              <a:buFont typeface="Arial" panose="020B0604020202020204" pitchFamily="34" charset="0"/>
-              <a:buChar char="•"/>
-            </a:pPr>
-            <a:r>
-              <a:rPr lang="ru-RU" b="0" i="0" dirty="0">
-                <a:effectLst/>
-                <a:latin typeface="fkGroteskNeue"/>
-              </a:rPr>
-              <a:t>Когда у пациента будет рецидив рака?</a:t>
-            </a:r>
-          </a:p>
-          <a:p>
-            <a:pPr algn="l">
-              <a:buFont typeface="Arial" panose="020B0604020202020204" pitchFamily="34" charset="0"/>
-              <a:buChar char="•"/>
-            </a:pPr>
-            <a:r>
-              <a:rPr lang="ru-RU" b="0" i="0" dirty="0">
-                <a:effectLst/>
-                <a:latin typeface="fkGroteskNeue"/>
-              </a:rPr>
-              <a:t>Как долго пациент проживёт после диагноза?</a:t>
-            </a:r>
-          </a:p>
-          <a:p>
-            <a:pPr algn="l">
-              <a:buFont typeface="Arial" panose="020B0604020202020204" pitchFamily="34" charset="0"/>
-              <a:buChar char="•"/>
-            </a:pPr>
-            <a:r>
-              <a:rPr lang="ru-RU" b="0" i="0" dirty="0">
-                <a:effectLst/>
-                <a:latin typeface="fkGroteskNeue"/>
-              </a:rPr>
-              <a:t>Через сколько лет произойдёт отказ трансплантата?</a:t>
-            </a:r>
-          </a:p>
-          <a:p>
-            <a:pPr algn="l"/>
-            <a:r>
-              <a:rPr lang="ru-RU" b="0" i="0" dirty="0">
-                <a:effectLst/>
-                <a:latin typeface="fkGroteskNeue"/>
-              </a:rPr>
-              <a:t>Это фундаментально другой тип задачи.</a:t>
-            </a:r>
+            <a:endParaRPr lang="ru-RU" b="0" i="0" dirty="0">
+              <a:effectLst/>
+              <a:latin typeface="fkGroteskNeue"/>
+            </a:endParaRPr>
           </a:p>
         </p:txBody>
       </p:sp>
@@ -4051,93 +1636,6 @@
           <a:lstStyle/>
           <a:p>
             <a:pPr algn="l"/>
-            <a:r>
-              <a:rPr lang="ru-RU" b="0" i="0" dirty="0">
-                <a:effectLst/>
-                <a:latin typeface="pplxSerif"/>
-              </a:rPr>
-              <a:t>Например, в анализе 399 014 пациенток с раком молочной железы из базы SEER оценивали риск сердечно‑сосудистой смерти с </a:t>
-            </a:r>
-            <a:r>
-              <a:rPr lang="ru-RU" b="0" i="0" dirty="0" err="1">
-                <a:effectLst/>
-                <a:latin typeface="pplxSerif"/>
-              </a:rPr>
-              <a:t>competing</a:t>
-            </a:r>
-            <a:r>
-              <a:rPr lang="ru-RU" b="0" i="0" dirty="0">
-                <a:effectLst/>
-                <a:latin typeface="pplxSerif"/>
-              </a:rPr>
-              <a:t> </a:t>
-            </a:r>
-            <a:r>
-              <a:rPr lang="ru-RU" b="0" i="0" dirty="0" err="1">
-                <a:effectLst/>
-                <a:latin typeface="pplxSerif"/>
-              </a:rPr>
-              <a:t>risks</a:t>
-            </a:r>
-            <a:r>
-              <a:rPr lang="ru-RU" b="0" i="0" dirty="0">
-                <a:effectLst/>
-                <a:latin typeface="pplxSerif"/>
-              </a:rPr>
-              <a:t>‑регрессией.​</a:t>
-            </a:r>
-            <a:br>
-              <a:rPr lang="ru-RU" dirty="0"/>
-            </a:br>
-            <a:r>
-              <a:rPr lang="ru-RU" b="0" i="0" dirty="0">
-                <a:effectLst/>
-                <a:latin typeface="pplxSerif"/>
-              </a:rPr>
-              <a:t>Модель Fine–</a:t>
-            </a:r>
-            <a:r>
-              <a:rPr lang="ru-RU" b="0" i="0" dirty="0" err="1">
-                <a:effectLst/>
-                <a:latin typeface="pplxSerif"/>
-              </a:rPr>
-              <a:t>Gray</a:t>
-            </a:r>
-            <a:r>
-              <a:rPr lang="ru-RU" b="0" i="0" dirty="0">
-                <a:effectLst/>
-                <a:latin typeface="pplxSerif"/>
-              </a:rPr>
-              <a:t> показала, что помимо возраста и стадии, на риск CV‑смерти влияют подтип опухоли и проведённое лечение — операция, химиотерапия, радиотерапия. Такой пример хорошо ложится на обсуждение </a:t>
-            </a:r>
-            <a:r>
-              <a:rPr lang="ru-RU" b="0" i="0" dirty="0" err="1">
-                <a:effectLst/>
-                <a:latin typeface="pplxSerif"/>
-              </a:rPr>
-              <a:t>cardio‑oncology</a:t>
-            </a:r>
-            <a:r>
-              <a:rPr lang="ru-RU" b="0" i="0" dirty="0">
-                <a:effectLst/>
-                <a:latin typeface="pplxSerif"/>
-              </a:rPr>
-              <a:t> и показывает, почему в выживаемости </a:t>
-            </a:r>
-            <a:r>
-              <a:rPr lang="ru-RU" b="0" i="0" dirty="0" err="1">
-                <a:effectLst/>
-                <a:latin typeface="pplxSerif"/>
-              </a:rPr>
-              <a:t>онкопациентов</a:t>
-            </a:r>
-            <a:r>
-              <a:rPr lang="ru-RU" b="0" i="0" dirty="0">
-                <a:effectLst/>
-                <a:latin typeface="pplxSerif"/>
-              </a:rPr>
-              <a:t> нельзя игнорировать конкурирующие причины смерти.</a:t>
-            </a:r>
             <a:endParaRPr lang="ru-RU" sz="1200" b="0" i="0" kern="1200" dirty="0">
               <a:solidFill>
                 <a:schemeClr val="tx1"/>
@@ -4231,229 +1729,6 @@
           <a:lstStyle/>
           <a:p>
             <a:pPr algn="l"/>
-            <a:r>
-              <a:rPr lang="ru-RU" b="0" i="0" dirty="0">
-                <a:effectLst/>
-                <a:latin typeface="pplxSerif"/>
-              </a:rPr>
-              <a:t>Стандартная </a:t>
-            </a:r>
-            <a:r>
-              <a:rPr lang="ru-RU" b="0" i="0" dirty="0" err="1">
-                <a:effectLst/>
-                <a:latin typeface="pplxSerif"/>
-              </a:rPr>
-              <a:t>Cox</a:t>
-            </a:r>
-            <a:r>
-              <a:rPr lang="ru-RU" b="0" i="0" dirty="0">
-                <a:effectLst/>
-                <a:latin typeface="pplxSerif"/>
-              </a:rPr>
-              <a:t>‑модель предполагает один базовый риск для всех. Но в онкологии часто есть группы с принципиально разными кривыми выживаемости: разные стадии, разные центры, разные когорты набора.​</a:t>
-            </a:r>
-            <a:br>
-              <a:rPr lang="ru-RU" dirty="0"/>
-            </a:br>
-            <a:r>
-              <a:rPr lang="ru-RU" b="0" i="0" dirty="0">
-                <a:effectLst/>
-                <a:latin typeface="pplxSerif"/>
-              </a:rPr>
-              <a:t>Стратифицированная </a:t>
-            </a:r>
-            <a:r>
-              <a:rPr lang="ru-RU" b="0" i="0" dirty="0" err="1">
-                <a:effectLst/>
-                <a:latin typeface="pplxSerif"/>
-              </a:rPr>
-              <a:t>Cox</a:t>
-            </a:r>
-            <a:r>
-              <a:rPr lang="ru-RU" b="0" i="0" dirty="0">
-                <a:effectLst/>
-                <a:latin typeface="pplxSerif"/>
-              </a:rPr>
-              <a:t>‑модель разрешает этому базовому риску отличаться между стратами, но при этом коэффициенты при </a:t>
-            </a:r>
-            <a:r>
-              <a:rPr lang="ru-RU" b="0" i="0" dirty="0" err="1">
-                <a:effectLst/>
-                <a:latin typeface="pplxSerif"/>
-              </a:rPr>
-              <a:t>ковариатах</a:t>
-            </a:r>
-            <a:r>
-              <a:rPr lang="ru-RU" b="0" i="0" dirty="0">
-                <a:effectLst/>
-                <a:latin typeface="pplxSerif"/>
-              </a:rPr>
-              <a:t> остаются общими. Формально это выглядит как </a:t>
-            </a:r>
-            <a:r>
-              <a:rPr lang="ru-RU" dirty="0">
-                <a:effectLst/>
-                <a:latin typeface="KaTeX_Main"/>
-              </a:rPr>
-              <a:t>λ0,s(t)</a:t>
-            </a:r>
-            <a:r>
-              <a:rPr lang="ru-RU" i="1" dirty="0">
-                <a:effectLst/>
-                <a:latin typeface="KaTeX_Math"/>
-              </a:rPr>
-              <a:t>λ</a:t>
-            </a:r>
-            <a:r>
-              <a:rPr lang="ru-RU" dirty="0">
-                <a:effectLst/>
-                <a:latin typeface="KaTeX_Main"/>
-              </a:rPr>
-              <a:t>0,</a:t>
-            </a:r>
-            <a:r>
-              <a:rPr lang="ru-RU" i="1" dirty="0">
-                <a:effectLst/>
-                <a:latin typeface="KaTeX_Math"/>
-              </a:rPr>
-              <a:t>s</a:t>
-            </a:r>
-            <a:r>
-              <a:rPr lang="ru-RU" dirty="0">
-                <a:effectLst/>
-                <a:latin typeface="KaTeX_Main"/>
-              </a:rPr>
-              <a:t>(</a:t>
-            </a:r>
-            <a:r>
-              <a:rPr lang="ru-RU" i="1" dirty="0">
-                <a:effectLst/>
-                <a:latin typeface="KaTeX_Math"/>
-              </a:rPr>
-              <a:t>t</a:t>
-            </a:r>
-            <a:r>
-              <a:rPr lang="ru-RU" dirty="0">
-                <a:effectLst/>
-                <a:latin typeface="KaTeX_Main"/>
-              </a:rPr>
-              <a:t>)</a:t>
-            </a:r>
-            <a:r>
-              <a:rPr lang="ru-RU" b="0" i="0" dirty="0">
-                <a:effectLst/>
-                <a:latin typeface="pplxSerif"/>
-              </a:rPr>
-              <a:t> для каждой страты </a:t>
-            </a:r>
-            <a:r>
-              <a:rPr lang="ru-RU" dirty="0" err="1">
-                <a:effectLst/>
-                <a:latin typeface="KaTeX_Main"/>
-              </a:rPr>
-              <a:t>s</a:t>
-            </a:r>
-            <a:r>
-              <a:rPr lang="ru-RU" i="1" dirty="0" err="1">
-                <a:effectLst/>
-                <a:latin typeface="KaTeX_Math"/>
-              </a:rPr>
-              <a:t>s</a:t>
-            </a:r>
-            <a:r>
-              <a:rPr lang="ru-RU" b="0" i="0" dirty="0">
-                <a:effectLst/>
-                <a:latin typeface="pplxSerif"/>
-              </a:rPr>
-              <a:t>, умноженная на </a:t>
-            </a:r>
-            <a:r>
-              <a:rPr lang="ru-RU" dirty="0" err="1">
-                <a:effectLst/>
-                <a:latin typeface="KaTeX_Main"/>
-              </a:rPr>
-              <a:t>exp</a:t>
-            </a:r>
-            <a:r>
-              <a:rPr lang="ru-RU" dirty="0">
-                <a:effectLst/>
-                <a:latin typeface="KaTeX_Main"/>
-              </a:rPr>
-              <a:t>⁡(β⊤X)</a:t>
-            </a:r>
-            <a:r>
-              <a:rPr lang="ru-RU" dirty="0" err="1">
-                <a:effectLst/>
-                <a:latin typeface="KaTeX_Main"/>
-              </a:rPr>
-              <a:t>exp</a:t>
-            </a:r>
-            <a:r>
-              <a:rPr lang="ru-RU" dirty="0">
-                <a:effectLst/>
-                <a:latin typeface="KaTeX_Main"/>
-              </a:rPr>
-              <a:t>(</a:t>
-            </a:r>
-            <a:r>
-              <a:rPr lang="ru-RU" i="1" dirty="0">
-                <a:effectLst/>
-                <a:latin typeface="KaTeX_Math"/>
-              </a:rPr>
-              <a:t>β</a:t>
-            </a:r>
-            <a:r>
-              <a:rPr lang="ru-RU" dirty="0">
-                <a:effectLst/>
-                <a:latin typeface="KaTeX_Main"/>
-              </a:rPr>
-              <a:t>⊤</a:t>
-            </a:r>
-            <a:r>
-              <a:rPr lang="ru-RU" i="1" dirty="0">
-                <a:effectLst/>
-                <a:latin typeface="KaTeX_Math"/>
-              </a:rPr>
-              <a:t>X</a:t>
-            </a:r>
-            <a:r>
-              <a:rPr lang="ru-RU" dirty="0">
-                <a:effectLst/>
-                <a:latin typeface="KaTeX_Main"/>
-              </a:rPr>
-              <a:t>)</a:t>
-            </a:r>
-            <a:r>
-              <a:rPr lang="ru-RU" b="0" i="0" dirty="0">
-                <a:effectLst/>
-                <a:latin typeface="pplxSerif"/>
-              </a:rPr>
-              <a:t>.</a:t>
-            </a:r>
-            <a:br>
-              <a:rPr lang="ru-RU" dirty="0"/>
-            </a:br>
-            <a:r>
-              <a:rPr lang="ru-RU" b="0" i="0" dirty="0">
-                <a:effectLst/>
-                <a:latin typeface="pplxSerif"/>
-              </a:rPr>
-              <a:t>Это удобно, когда стадия или центр явно влияют на форму кривой, но нас интересует не их HR, а корректная оценка других эффектов — лечения, </a:t>
-            </a:r>
-            <a:r>
-              <a:rPr lang="ru-RU" b="0" i="0" dirty="0" err="1">
-                <a:effectLst/>
-                <a:latin typeface="pplxSerif"/>
-              </a:rPr>
-              <a:t>биомаркеров</a:t>
-            </a:r>
-            <a:r>
-              <a:rPr lang="ru-RU" b="0" i="0" dirty="0">
-                <a:effectLst/>
-                <a:latin typeface="pplxSerif"/>
-              </a:rPr>
-              <a:t> и т.д.</a:t>
-            </a:r>
             <a:endParaRPr lang="ru-RU" sz="1200" b="0" i="0" kern="1200" dirty="0">
               <a:solidFill>
                 <a:schemeClr val="tx1"/>
@@ -4547,65 +1822,6 @@
           <a:lstStyle/>
           <a:p>
             <a:pPr algn="l"/>
-            <a:r>
-              <a:rPr lang="ru-RU" b="0" i="0" dirty="0">
-                <a:effectLst/>
-                <a:latin typeface="pplxSerif"/>
-              </a:rPr>
-              <a:t>Есть работа по 15 830 пациенткам с раком молочной железы, где сравнивали обычную и стратифицированную </a:t>
-            </a:r>
-            <a:r>
-              <a:rPr lang="ru-RU" b="0" i="0" dirty="0" err="1">
-                <a:effectLst/>
-                <a:latin typeface="pplxSerif"/>
-              </a:rPr>
-              <a:t>Cox</a:t>
-            </a:r>
-            <a:r>
-              <a:rPr lang="ru-RU" b="0" i="0" dirty="0">
-                <a:effectLst/>
-                <a:latin typeface="pplxSerif"/>
-              </a:rPr>
-              <a:t>‑модели. Там базовый риск сильно отличался между стадиями I–IV, и PH‑предположение для лечения нарушалось.​</a:t>
-            </a:r>
-            <a:br>
-              <a:rPr lang="ru-RU" dirty="0"/>
-            </a:br>
-            <a:r>
-              <a:rPr lang="ru-RU" b="0" i="0" dirty="0">
-                <a:effectLst/>
-                <a:latin typeface="pplxSerif"/>
-              </a:rPr>
-              <a:t>После перехода к стратифицированной модели по стадии </a:t>
-            </a:r>
-            <a:r>
-              <a:rPr lang="ru-RU" b="0" i="0" dirty="0" err="1">
-                <a:effectLst/>
-                <a:latin typeface="pplxSerif"/>
-              </a:rPr>
-              <a:t>baseline</a:t>
-            </a:r>
-            <a:r>
-              <a:rPr lang="ru-RU" b="0" i="0" dirty="0">
-                <a:effectLst/>
-                <a:latin typeface="pplxSerif"/>
-              </a:rPr>
-              <a:t> </a:t>
-            </a:r>
-            <a:r>
-              <a:rPr lang="ru-RU" b="0" i="0" dirty="0" err="1">
-                <a:effectLst/>
-                <a:latin typeface="pplxSerif"/>
-              </a:rPr>
-              <a:t>hazard</a:t>
-            </a:r>
-            <a:r>
-              <a:rPr lang="ru-RU" b="0" i="0" dirty="0">
-                <a:effectLst/>
-                <a:latin typeface="pplxSerif"/>
-              </a:rPr>
-              <a:t> стал отдельным в каждой стадии, и оценки HR для химио‑ и радиотерапии стали более стабильными и клинически осмысленными. Студенты могут запомнить: когда “форма” кривых сильно различается между крупными клиническими группами — первая опция не выбрасывать фактор, а стратифицировать по нему</a:t>
-            </a:r>
             <a:endParaRPr lang="ru-RU" sz="1200" b="0" i="0" kern="1200" dirty="0">
               <a:solidFill>
                 <a:schemeClr val="tx1"/>
@@ -4698,109 +1914,6 @@
           <a:bodyPr/>
           <a:lstStyle/>
           <a:p>
-            <a:pPr algn="l"/>
-            <a:r>
-              <a:rPr lang="en-US" b="0" i="0" dirty="0">
-                <a:effectLst/>
-                <a:latin typeface="fkGroteskNeue"/>
-              </a:rPr>
-              <a:t>Time-dependent ROC:</a:t>
-            </a:r>
-          </a:p>
-          <a:p>
-            <a:pPr algn="l"/>
-            <a:r>
-              <a:rPr lang="en-US" b="0" i="0" dirty="0">
-                <a:effectLst/>
-                <a:latin typeface="fkGroteskNeue"/>
-              </a:rPr>
-              <a:t>ROC curves </a:t>
-            </a:r>
-            <a:r>
-              <a:rPr lang="ru-RU" b="0" i="0" dirty="0">
-                <a:effectLst/>
-                <a:latin typeface="fkGroteskNeue"/>
-              </a:rPr>
-              <a:t>при </a:t>
-            </a:r>
-            <a:r>
-              <a:rPr lang="en-US" b="0" i="0" dirty="0">
-                <a:effectLst/>
-                <a:latin typeface="fkGroteskNeue"/>
-              </a:rPr>
-              <a:t>time-dependent outcome (survival).</a:t>
-            </a:r>
-          </a:p>
-          <a:p>
-            <a:pPr algn="l"/>
-            <a:r>
-              <a:rPr lang="en-US" b="0" i="0" dirty="0">
-                <a:effectLst/>
-                <a:latin typeface="fkGroteskNeue"/>
-              </a:rPr>
-              <a:t>AUC_ROC(t) = </a:t>
-            </a:r>
-            <a:r>
-              <a:rPr lang="ru-RU" b="0" i="0" dirty="0">
-                <a:effectLst/>
-                <a:latin typeface="fkGroteskNeue"/>
-              </a:rPr>
-              <a:t>вероятность, что модель правильно ранжирует пациентов на момент </a:t>
-            </a:r>
-            <a:r>
-              <a:rPr lang="en-US" b="0" i="0" dirty="0">
-                <a:effectLst/>
-                <a:latin typeface="fkGroteskNeue"/>
-              </a:rPr>
-              <a:t>t.</a:t>
-            </a:r>
-          </a:p>
-          <a:p>
-            <a:pPr algn="l"/>
-            <a:r>
-              <a:rPr lang="ru-RU" b="0" i="0" dirty="0">
-                <a:effectLst/>
-                <a:latin typeface="fkGroteskNeue"/>
-              </a:rPr>
-              <a:t>Интегрированная </a:t>
-            </a:r>
-            <a:r>
-              <a:rPr lang="en-US" b="0" i="0" dirty="0">
-                <a:effectLst/>
-                <a:latin typeface="fkGroteskNeue"/>
-              </a:rPr>
-              <a:t>AUC: </a:t>
-            </a:r>
-            <a:r>
-              <a:rPr lang="ru-RU" b="0" i="0" dirty="0">
-                <a:effectLst/>
-                <a:latin typeface="fkGroteskNeue"/>
-              </a:rPr>
-              <a:t>средняя </a:t>
-            </a:r>
-            <a:r>
-              <a:rPr lang="en-US" b="0" i="0" dirty="0">
-                <a:effectLst/>
-                <a:latin typeface="fkGroteskNeue"/>
-              </a:rPr>
-              <a:t>AUC </a:t>
-            </a:r>
-            <a:r>
-              <a:rPr lang="ru-RU" b="0" i="0" dirty="0">
-                <a:effectLst/>
-                <a:latin typeface="fkGroteskNeue"/>
-              </a:rPr>
-              <a:t>по всем </a:t>
-            </a:r>
-            <a:r>
-              <a:rPr lang="en-US" b="0" i="0" dirty="0">
-                <a:effectLst/>
-                <a:latin typeface="fkGroteskNeue"/>
-              </a:rPr>
-              <a:t>t.</a:t>
-            </a:r>
-          </a:p>
-          <a:p>
             <a:endParaRPr lang="ru-RU" sz="1200" b="0" i="0" kern="1200" dirty="0">
               <a:solidFill>
                 <a:schemeClr val="tx1"/>
@@ -4894,149 +2007,6 @@
           <a:lstStyle/>
           <a:p>
             <a:pPr algn="l"/>
-            <a:r>
-              <a:rPr lang="ru-RU" b="0" i="0" dirty="0">
-                <a:effectLst/>
-                <a:latin typeface="pplxSerif"/>
-              </a:rPr>
-              <a:t>До сих пор </a:t>
-            </a:r>
-            <a:r>
-              <a:rPr lang="ru-RU" b="0" i="0" dirty="0" err="1">
-                <a:effectLst/>
-                <a:latin typeface="pplxSerif"/>
-              </a:rPr>
-              <a:t>ковариаты</a:t>
-            </a:r>
-            <a:r>
-              <a:rPr lang="ru-RU" b="0" i="0" dirty="0">
-                <a:effectLst/>
-                <a:latin typeface="pplxSerif"/>
-              </a:rPr>
-              <a:t> считались фиксированными на момент включения. В реальных онкологических когортах многие факторы меняются: пациент начал химиотерапию через 3 месяца, у кого‑то возник рецидив, у кого‑то снизился маркёр.​</a:t>
-            </a:r>
-            <a:br>
-              <a:rPr lang="ru-RU" dirty="0"/>
-            </a:br>
-            <a:r>
-              <a:rPr lang="ru-RU" b="0" i="0" dirty="0">
-                <a:effectLst/>
-                <a:latin typeface="pplxSerif"/>
-              </a:rPr>
-              <a:t>Такие переменные — </a:t>
-            </a:r>
-            <a:r>
-              <a:rPr lang="ru-RU" b="0" i="0" dirty="0" err="1">
-                <a:effectLst/>
-                <a:latin typeface="pplxSerif"/>
-              </a:rPr>
-              <a:t>time‑dependent</a:t>
-            </a:r>
-            <a:r>
-              <a:rPr lang="ru-RU" b="0" i="0" dirty="0">
-                <a:effectLst/>
-                <a:latin typeface="pplxSerif"/>
-              </a:rPr>
-              <a:t> </a:t>
-            </a:r>
-            <a:r>
-              <a:rPr lang="ru-RU" b="0" i="0" dirty="0" err="1">
-                <a:effectLst/>
-                <a:latin typeface="pplxSerif"/>
-              </a:rPr>
-              <a:t>covariates</a:t>
-            </a:r>
-            <a:r>
-              <a:rPr lang="ru-RU" b="0" i="0" dirty="0">
-                <a:effectLst/>
-                <a:latin typeface="pplxSerif"/>
-              </a:rPr>
-              <a:t>. Для них данные представляют как интервалы </a:t>
-            </a:r>
-            <a:r>
-              <a:rPr lang="ru-RU" b="0" i="0" dirty="0" err="1">
-                <a:effectLst/>
-                <a:latin typeface="pplxSerif"/>
-              </a:rPr>
-              <a:t>start</a:t>
-            </a:r>
-            <a:r>
-              <a:rPr lang="ru-RU" b="0" i="0" dirty="0">
-                <a:effectLst/>
-                <a:latin typeface="pplxSerif"/>
-              </a:rPr>
-              <a:t>–</a:t>
-            </a:r>
-            <a:r>
-              <a:rPr lang="ru-RU" b="0" i="0" dirty="0" err="1">
-                <a:effectLst/>
-                <a:latin typeface="pplxSerif"/>
-              </a:rPr>
-              <a:t>stop</a:t>
-            </a:r>
-            <a:r>
-              <a:rPr lang="ru-RU" b="0" i="0" dirty="0">
-                <a:effectLst/>
-                <a:latin typeface="pplxSerif"/>
-              </a:rPr>
-              <a:t>: до начала терапии — одна запись, после — другая, с другим значением X. </a:t>
-            </a:r>
-            <a:r>
-              <a:rPr lang="ru-RU" b="0" i="0" dirty="0" err="1">
-                <a:effectLst/>
-                <a:latin typeface="pplxSerif"/>
-              </a:rPr>
-              <a:t>Cox</a:t>
-            </a:r>
-            <a:r>
-              <a:rPr lang="ru-RU" b="0" i="0" dirty="0">
-                <a:effectLst/>
-                <a:latin typeface="pplxSerif"/>
-              </a:rPr>
-              <a:t>‑модель тогда оценивает эффект лечения по времени, когда пациент реально его получал. Это существенно уменьшает </a:t>
-            </a:r>
-            <a:r>
-              <a:rPr lang="ru-RU" b="0" i="0" dirty="0" err="1">
-                <a:effectLst/>
-                <a:latin typeface="pplxSerif"/>
-              </a:rPr>
-              <a:t>immortal</a:t>
-            </a:r>
-            <a:r>
-              <a:rPr lang="ru-RU" b="0" i="0" dirty="0">
-                <a:effectLst/>
-                <a:latin typeface="pplxSerif"/>
-              </a:rPr>
-              <a:t> </a:t>
-            </a:r>
-            <a:r>
-              <a:rPr lang="ru-RU" b="0" i="0" dirty="0" err="1">
-                <a:effectLst/>
-                <a:latin typeface="pplxSerif"/>
-              </a:rPr>
-              <a:t>time</a:t>
-            </a:r>
-            <a:r>
-              <a:rPr lang="ru-RU" b="0" i="0" dirty="0">
-                <a:effectLst/>
-                <a:latin typeface="pplxSerif"/>
-              </a:rPr>
-              <a:t> </a:t>
-            </a:r>
-            <a:r>
-              <a:rPr lang="ru-RU" b="0" i="0" dirty="0" err="1">
-                <a:effectLst/>
-                <a:latin typeface="pplxSerif"/>
-              </a:rPr>
-              <a:t>bias</a:t>
-            </a:r>
-            <a:r>
-              <a:rPr lang="ru-RU" b="0" i="0" dirty="0">
-                <a:effectLst/>
-                <a:latin typeface="pplxSerif"/>
-              </a:rPr>
-              <a:t> и даёт более честную оценку терапевтического эффекта.</a:t>
-            </a:r>
             <a:endParaRPr lang="ru-RU" sz="1200" b="0" i="0" kern="1200" dirty="0">
               <a:solidFill>
                 <a:schemeClr val="tx1"/>
@@ -5130,149 +2100,6 @@
           <a:lstStyle/>
           <a:p>
             <a:pPr algn="l"/>
-            <a:r>
-              <a:rPr lang="ru-RU" b="0" i="0" dirty="0">
-                <a:effectLst/>
-                <a:latin typeface="pplxSerif"/>
-              </a:rPr>
-              <a:t>До сих пор </a:t>
-            </a:r>
-            <a:r>
-              <a:rPr lang="ru-RU" b="0" i="0" dirty="0" err="1">
-                <a:effectLst/>
-                <a:latin typeface="pplxSerif"/>
-              </a:rPr>
-              <a:t>ковариаты</a:t>
-            </a:r>
-            <a:r>
-              <a:rPr lang="ru-RU" b="0" i="0" dirty="0">
-                <a:effectLst/>
-                <a:latin typeface="pplxSerif"/>
-              </a:rPr>
-              <a:t> считались фиксированными на момент включения. В реальных онкологических когортах многие факторы меняются: пациент начал химиотерапию через 3 месяца, у кого‑то возник рецидив, у кого‑то снизился маркёр.​</a:t>
-            </a:r>
-            <a:br>
-              <a:rPr lang="ru-RU" dirty="0"/>
-            </a:br>
-            <a:r>
-              <a:rPr lang="ru-RU" b="0" i="0" dirty="0">
-                <a:effectLst/>
-                <a:latin typeface="pplxSerif"/>
-              </a:rPr>
-              <a:t>Такие переменные — </a:t>
-            </a:r>
-            <a:r>
-              <a:rPr lang="ru-RU" b="0" i="0" dirty="0" err="1">
-                <a:effectLst/>
-                <a:latin typeface="pplxSerif"/>
-              </a:rPr>
-              <a:t>time‑dependent</a:t>
-            </a:r>
-            <a:r>
-              <a:rPr lang="ru-RU" b="0" i="0" dirty="0">
-                <a:effectLst/>
-                <a:latin typeface="pplxSerif"/>
-              </a:rPr>
-              <a:t> </a:t>
-            </a:r>
-            <a:r>
-              <a:rPr lang="ru-RU" b="0" i="0" dirty="0" err="1">
-                <a:effectLst/>
-                <a:latin typeface="pplxSerif"/>
-              </a:rPr>
-              <a:t>covariates</a:t>
-            </a:r>
-            <a:r>
-              <a:rPr lang="ru-RU" b="0" i="0" dirty="0">
-                <a:effectLst/>
-                <a:latin typeface="pplxSerif"/>
-              </a:rPr>
-              <a:t>. Для них данные представляют как интервалы </a:t>
-            </a:r>
-            <a:r>
-              <a:rPr lang="ru-RU" b="0" i="0" dirty="0" err="1">
-                <a:effectLst/>
-                <a:latin typeface="pplxSerif"/>
-              </a:rPr>
-              <a:t>start</a:t>
-            </a:r>
-            <a:r>
-              <a:rPr lang="ru-RU" b="0" i="0" dirty="0">
-                <a:effectLst/>
-                <a:latin typeface="pplxSerif"/>
-              </a:rPr>
-              <a:t>–</a:t>
-            </a:r>
-            <a:r>
-              <a:rPr lang="ru-RU" b="0" i="0" dirty="0" err="1">
-                <a:effectLst/>
-                <a:latin typeface="pplxSerif"/>
-              </a:rPr>
-              <a:t>stop</a:t>
-            </a:r>
-            <a:r>
-              <a:rPr lang="ru-RU" b="0" i="0" dirty="0">
-                <a:effectLst/>
-                <a:latin typeface="pplxSerif"/>
-              </a:rPr>
-              <a:t>: до начала терапии — одна запись, после — другая, с другим значением X. </a:t>
-            </a:r>
-            <a:r>
-              <a:rPr lang="ru-RU" b="0" i="0" dirty="0" err="1">
-                <a:effectLst/>
-                <a:latin typeface="pplxSerif"/>
-              </a:rPr>
-              <a:t>Cox</a:t>
-            </a:r>
-            <a:r>
-              <a:rPr lang="ru-RU" b="0" i="0" dirty="0">
-                <a:effectLst/>
-                <a:latin typeface="pplxSerif"/>
-              </a:rPr>
-              <a:t>‑модель тогда оценивает эффект лечения по времени, когда пациент реально его получал. Это существенно уменьшает </a:t>
-            </a:r>
-            <a:r>
-              <a:rPr lang="ru-RU" b="0" i="0" dirty="0" err="1">
-                <a:effectLst/>
-                <a:latin typeface="pplxSerif"/>
-              </a:rPr>
-              <a:t>immortal</a:t>
-            </a:r>
-            <a:r>
-              <a:rPr lang="ru-RU" b="0" i="0" dirty="0">
-                <a:effectLst/>
-                <a:latin typeface="pplxSerif"/>
-              </a:rPr>
-              <a:t> </a:t>
-            </a:r>
-            <a:r>
-              <a:rPr lang="ru-RU" b="0" i="0" dirty="0" err="1">
-                <a:effectLst/>
-                <a:latin typeface="pplxSerif"/>
-              </a:rPr>
-              <a:t>time</a:t>
-            </a:r>
-            <a:r>
-              <a:rPr lang="ru-RU" b="0" i="0" dirty="0">
-                <a:effectLst/>
-                <a:latin typeface="pplxSerif"/>
-              </a:rPr>
-              <a:t> </a:t>
-            </a:r>
-            <a:r>
-              <a:rPr lang="ru-RU" b="0" i="0" dirty="0" err="1">
-                <a:effectLst/>
-                <a:latin typeface="pplxSerif"/>
-              </a:rPr>
-              <a:t>bias</a:t>
-            </a:r>
-            <a:r>
-              <a:rPr lang="ru-RU" b="0" i="0" dirty="0">
-                <a:effectLst/>
-                <a:latin typeface="pplxSerif"/>
-              </a:rPr>
-              <a:t> и даёт более честную оценку терапевтического эффекта.</a:t>
-            </a:r>
             <a:endParaRPr lang="ru-RU" sz="1200" b="0" i="0" kern="1200" dirty="0">
               <a:solidFill>
                 <a:schemeClr val="tx1"/>
@@ -5366,107 +2193,6 @@
           <a:lstStyle/>
           <a:p>
             <a:pPr algn="l"/>
-            <a:r>
-              <a:rPr lang="ru-RU" b="0" i="0" dirty="0">
-                <a:effectLst/>
-                <a:latin typeface="pplxSerif"/>
-              </a:rPr>
-              <a:t>Даже если базовый риск пропорционален, не факт, что HR для </a:t>
-            </a:r>
-            <a:r>
-              <a:rPr lang="ru-RU" b="0" i="0" dirty="0" err="1">
-                <a:effectLst/>
-                <a:latin typeface="pplxSerif"/>
-              </a:rPr>
-              <a:t>ковариаты</a:t>
-            </a:r>
-            <a:r>
-              <a:rPr lang="ru-RU" b="0" i="0" dirty="0">
-                <a:effectLst/>
-                <a:latin typeface="pplxSerif"/>
-              </a:rPr>
-              <a:t> постоянен. В долгих онкологических когортах это типично: сначала </a:t>
-            </a:r>
-            <a:r>
-              <a:rPr lang="ru-RU" b="0" i="0" dirty="0" err="1">
-                <a:effectLst/>
-                <a:latin typeface="pplxSerif"/>
-              </a:rPr>
-              <a:t>гормонпозитивный</a:t>
-            </a:r>
-            <a:r>
-              <a:rPr lang="ru-RU" b="0" i="0" dirty="0">
-                <a:effectLst/>
-                <a:latin typeface="pplxSerif"/>
-              </a:rPr>
-              <a:t> статус и низкая степень злокачественности сильно защищают, а через 10 лет их преимущество почти исчезает.</a:t>
-            </a:r>
-            <a:br>
-              <a:rPr lang="ru-RU" dirty="0"/>
-            </a:br>
-            <a:r>
-              <a:rPr lang="ru-RU" b="0" i="0" dirty="0">
-                <a:effectLst/>
-                <a:latin typeface="pplxSerif"/>
-              </a:rPr>
-              <a:t>Это можно моделировать через </a:t>
-            </a:r>
-            <a:r>
-              <a:rPr lang="ru-RU" b="0" i="0" dirty="0" err="1">
-                <a:effectLst/>
-                <a:latin typeface="pplxSerif"/>
-              </a:rPr>
-              <a:t>time‑varying</a:t>
-            </a:r>
-            <a:r>
-              <a:rPr lang="ru-RU" b="0" i="0" dirty="0">
-                <a:effectLst/>
-                <a:latin typeface="pplxSerif"/>
-              </a:rPr>
-              <a:t> </a:t>
-            </a:r>
-            <a:r>
-              <a:rPr lang="ru-RU" b="0" i="0" dirty="0" err="1">
-                <a:effectLst/>
-                <a:latin typeface="pplxSerif"/>
-              </a:rPr>
-              <a:t>coefficients</a:t>
-            </a:r>
-            <a:r>
-              <a:rPr lang="ru-RU" b="0" i="0" dirty="0">
-                <a:effectLst/>
-                <a:latin typeface="pplxSerif"/>
-              </a:rPr>
-              <a:t>: добавляем в модель член </a:t>
-            </a:r>
-            <a:r>
-              <a:rPr lang="ru-RU" b="0" i="0" dirty="0" err="1">
-                <a:effectLst/>
-                <a:latin typeface="pplxSerif"/>
-              </a:rPr>
-              <a:t>X×g</a:t>
-            </a:r>
-            <a:r>
-              <a:rPr lang="ru-RU" b="0" i="0" dirty="0">
-                <a:effectLst/>
-                <a:latin typeface="pplxSerif"/>
-              </a:rPr>
-              <a:t>(t), например </a:t>
-            </a:r>
-            <a:r>
-              <a:rPr lang="ru-RU" b="0" i="0" dirty="0" err="1">
-                <a:effectLst/>
-                <a:latin typeface="pplxSerif"/>
-              </a:rPr>
-              <a:t>X×log</a:t>
-            </a:r>
-            <a:r>
-              <a:rPr lang="ru-RU" b="0" i="0" dirty="0">
-                <a:effectLst/>
-                <a:latin typeface="pplxSerif"/>
-              </a:rPr>
-              <a:t>(t). Тогда HR становится функцией времени. Это уже не “один HR на всю жизнь”, а кривая HR(t), которую можно интерпретировать клинически.</a:t>
-            </a:r>
             <a:endParaRPr lang="ru-RU" sz="1200" b="0" i="0" kern="1200" dirty="0">
               <a:solidFill>
                 <a:schemeClr val="tx1"/>
@@ -5560,89 +2286,6 @@
           <a:lstStyle/>
           <a:p>
             <a:pPr algn="l"/>
-            <a:r>
-              <a:rPr lang="ru-RU" b="0" i="0" dirty="0">
-                <a:effectLst/>
-                <a:latin typeface="pplxSerif"/>
-              </a:rPr>
-              <a:t>В исследовании 956 пациенток с раком молочной железы после </a:t>
-            </a:r>
-            <a:r>
-              <a:rPr lang="ru-RU" b="0" i="0" dirty="0" err="1">
-                <a:effectLst/>
-                <a:latin typeface="pplxSerif"/>
-              </a:rPr>
-              <a:t>неоадъювантной</a:t>
-            </a:r>
-            <a:r>
-              <a:rPr lang="ru-RU" b="0" i="0" dirty="0">
-                <a:effectLst/>
-                <a:latin typeface="pplxSerif"/>
-              </a:rPr>
-              <a:t> химиотерапии авторы прямо показали, что эффект гормональных рецепторов и степени злокачественности меняется со временем.​</a:t>
-            </a:r>
-            <a:br>
-              <a:rPr lang="ru-RU" dirty="0"/>
-            </a:br>
-            <a:r>
-              <a:rPr lang="ru-RU" b="0" i="0" dirty="0">
-                <a:effectLst/>
-                <a:latin typeface="pplxSerif"/>
-              </a:rPr>
-              <a:t>В первые месяцы и годы HR для ER+ порядка 0.26 — очень сильный </a:t>
-            </a:r>
-            <a:r>
-              <a:rPr lang="ru-RU" b="0" i="0" dirty="0" err="1">
-                <a:effectLst/>
-                <a:latin typeface="pplxSerif"/>
-              </a:rPr>
-              <a:t>протективный</a:t>
-            </a:r>
-            <a:r>
-              <a:rPr lang="ru-RU" b="0" i="0" dirty="0">
-                <a:effectLst/>
-                <a:latin typeface="pplxSerif"/>
-              </a:rPr>
-              <a:t> эффект. Но к 10‑му году HR достигает примерно 2.2: риск отдалённых рецидивов у ER+ становится выше, чем у ER−.​</a:t>
-            </a:r>
-            <a:br>
-              <a:rPr lang="ru-RU" dirty="0"/>
-            </a:br>
-            <a:r>
-              <a:rPr lang="ru-RU" b="0" i="0" dirty="0">
-                <a:effectLst/>
-                <a:latin typeface="pplxSerif"/>
-              </a:rPr>
-              <a:t>Обычная </a:t>
-            </a:r>
-            <a:r>
-              <a:rPr lang="ru-RU" b="0" i="0" dirty="0" err="1">
-                <a:effectLst/>
-                <a:latin typeface="pplxSerif"/>
-              </a:rPr>
-              <a:t>Cox</a:t>
-            </a:r>
-            <a:r>
-              <a:rPr lang="ru-RU" b="0" i="0" dirty="0">
-                <a:effectLst/>
-                <a:latin typeface="pplxSerif"/>
-              </a:rPr>
-              <a:t>‑модель усреднит это в какой‑то “средний HR” и исказит клиническую картину. Модель с </a:t>
-            </a:r>
-            <a:r>
-              <a:rPr lang="ru-RU" b="0" i="0" dirty="0" err="1">
-                <a:effectLst/>
-                <a:latin typeface="pplxSerif"/>
-              </a:rPr>
-              <a:t>time‑varying</a:t>
-            </a:r>
-            <a:r>
-              <a:rPr lang="ru-RU" b="0" i="0" dirty="0">
-                <a:effectLst/>
-                <a:latin typeface="pplxSerif"/>
-              </a:rPr>
-              <a:t> коэффициентами позволяет явно показать студентам, как эволюционирует риск на длинном горизонте.</a:t>
-            </a:r>
             <a:endParaRPr lang="ru-RU" sz="1200" b="0" i="0" kern="1200" dirty="0">
               <a:solidFill>
                 <a:schemeClr val="tx1"/>
@@ -5735,195 +2378,6 @@
           <a:bodyPr/>
           <a:lstStyle/>
           <a:p>
-            <a:pPr algn="l"/>
-            <a:r>
-              <a:rPr lang="ru-RU" b="0" i="0" dirty="0" err="1">
-                <a:effectLst/>
-                <a:latin typeface="fkGroteskNeue"/>
-              </a:rPr>
-              <a:t>Internal</a:t>
-            </a:r>
-            <a:r>
-              <a:rPr lang="ru-RU" b="0" i="0" dirty="0">
-                <a:effectLst/>
-                <a:latin typeface="fkGroteskNeue"/>
-              </a:rPr>
-              <a:t> валидация:</a:t>
-            </a:r>
-          </a:p>
-          <a:p>
-            <a:pPr algn="l"/>
-            <a:r>
-              <a:rPr lang="ru-RU" b="0" i="0" dirty="0">
-                <a:effectLst/>
-                <a:latin typeface="fkGroteskNeue"/>
-              </a:rPr>
-              <a:t>K-</a:t>
-            </a:r>
-            <a:r>
-              <a:rPr lang="ru-RU" b="0" i="0" dirty="0" err="1">
-                <a:effectLst/>
-                <a:latin typeface="fkGroteskNeue"/>
-              </a:rPr>
-              <a:t>fold</a:t>
-            </a:r>
-            <a:r>
-              <a:rPr lang="ru-RU" b="0" i="0" dirty="0">
-                <a:effectLst/>
-                <a:latin typeface="fkGroteskNeue"/>
-              </a:rPr>
-              <a:t> CV. На каждом </a:t>
-            </a:r>
-            <a:r>
-              <a:rPr lang="ru-RU" b="0" i="0" dirty="0" err="1">
-                <a:effectLst/>
-                <a:latin typeface="fkGroteskNeue"/>
-              </a:rPr>
-              <a:t>фолде</a:t>
-            </a:r>
-            <a:r>
-              <a:rPr lang="ru-RU" b="0" i="0" dirty="0">
-                <a:effectLst/>
-                <a:latin typeface="fkGroteskNeue"/>
-              </a:rPr>
-              <a:t> обучаем модель и тестируем C-</a:t>
-            </a:r>
-            <a:r>
-              <a:rPr lang="ru-RU" b="0" i="0" dirty="0" err="1">
-                <a:effectLst/>
-                <a:latin typeface="fkGroteskNeue"/>
-              </a:rPr>
-              <a:t>index</a:t>
-            </a:r>
-            <a:r>
-              <a:rPr lang="ru-RU" b="0" i="0" dirty="0">
-                <a:effectLst/>
-                <a:latin typeface="fkGroteskNeue"/>
-              </a:rPr>
-              <a:t>.</a:t>
-            </a:r>
-          </a:p>
-          <a:p>
-            <a:pPr algn="l"/>
-            <a:r>
-              <a:rPr lang="ru-RU" b="0" i="0" dirty="0">
-                <a:effectLst/>
-                <a:latin typeface="fkGroteskNeue"/>
-              </a:rPr>
-              <a:t>Результат: C-</a:t>
-            </a:r>
-            <a:r>
-              <a:rPr lang="ru-RU" b="0" i="0" dirty="0" err="1">
-                <a:effectLst/>
-                <a:latin typeface="fkGroteskNeue"/>
-              </a:rPr>
-              <a:t>index</a:t>
-            </a:r>
-            <a:r>
-              <a:rPr lang="ru-RU" b="0" i="0" dirty="0">
-                <a:effectLst/>
-                <a:latin typeface="fkGroteskNeue"/>
-              </a:rPr>
-              <a:t> на </a:t>
-            </a:r>
-            <a:r>
-              <a:rPr lang="ru-RU" b="0" i="0" dirty="0" err="1">
-                <a:effectLst/>
-                <a:latin typeface="fkGroteskNeue"/>
-              </a:rPr>
-              <a:t>test</a:t>
-            </a:r>
-            <a:r>
-              <a:rPr lang="ru-RU" b="0" i="0" dirty="0">
-                <a:effectLst/>
-                <a:latin typeface="fkGroteskNeue"/>
-              </a:rPr>
-              <a:t> </a:t>
-            </a:r>
-            <a:r>
-              <a:rPr lang="ru-RU" b="0" i="0" dirty="0" err="1">
-                <a:effectLst/>
-                <a:latin typeface="fkGroteskNeue"/>
-              </a:rPr>
-              <a:t>фолдах</a:t>
-            </a:r>
-            <a:r>
-              <a:rPr lang="ru-RU" b="0" i="0" dirty="0">
-                <a:effectLst/>
-                <a:latin typeface="fkGroteskNeue"/>
-              </a:rPr>
-              <a:t> обычно чуть ниже, чем на </a:t>
-            </a:r>
-            <a:r>
-              <a:rPr lang="ru-RU" b="0" i="0" dirty="0" err="1">
-                <a:effectLst/>
-                <a:latin typeface="fkGroteskNeue"/>
-              </a:rPr>
-              <a:t>training</a:t>
-            </a:r>
-            <a:r>
-              <a:rPr lang="ru-RU" b="0" i="0" dirty="0">
-                <a:effectLst/>
-                <a:latin typeface="fkGroteskNeue"/>
-              </a:rPr>
-              <a:t>.</a:t>
-            </a:r>
-          </a:p>
-          <a:p>
-            <a:pPr algn="l"/>
-            <a:r>
-              <a:rPr lang="ru-RU" b="0" i="0" dirty="0" err="1">
-                <a:effectLst/>
-                <a:latin typeface="fkGroteskNeue"/>
-              </a:rPr>
-              <a:t>External</a:t>
-            </a:r>
-            <a:r>
-              <a:rPr lang="ru-RU" b="0" i="0" dirty="0">
-                <a:effectLst/>
-                <a:latin typeface="fkGroteskNeue"/>
-              </a:rPr>
-              <a:t> валидация:</a:t>
-            </a:r>
-          </a:p>
-          <a:p>
-            <a:pPr algn="l"/>
-            <a:r>
-              <a:rPr lang="ru-RU" b="0" i="0" dirty="0">
-                <a:effectLst/>
-                <a:latin typeface="fkGroteskNeue"/>
-              </a:rPr>
-              <a:t>Совершенно независимая когорта. Это самый честный тест.</a:t>
-            </a:r>
-          </a:p>
-          <a:p>
-            <a:pPr algn="l"/>
-            <a:r>
-              <a:rPr lang="ru-RU" b="0" i="0" dirty="0">
-                <a:effectLst/>
-                <a:latin typeface="fkGroteskNeue"/>
-              </a:rPr>
-              <a:t>Пример: обучили на 400 пациентах за 2010-2015, тестируем на 200 пациентах за 2015-2020.</a:t>
-            </a:r>
-          </a:p>
-          <a:p>
-            <a:pPr algn="l"/>
-            <a:endParaRPr lang="ru-RU" b="0" i="0" dirty="0">
-              <a:effectLst/>
-              <a:latin typeface="fkGroteskNeue"/>
-            </a:endParaRPr>
-          </a:p>
-          <a:p>
-            <a:pPr algn="l"/>
-            <a:r>
-              <a:rPr lang="ru-RU" b="0" i="0" dirty="0">
-                <a:effectLst/>
-                <a:latin typeface="fkGroteskNeue"/>
-              </a:rPr>
-              <a:t>ПАУЗА</a:t>
-            </a:r>
-          </a:p>
-          <a:p>
             <a:endParaRPr lang="ru-RU" sz="1200" b="0" i="0" kern="1200" dirty="0">
               <a:solidFill>
                 <a:schemeClr val="tx1"/>
@@ -6016,102 +2470,6 @@
           <a:bodyPr/>
           <a:lstStyle/>
           <a:p>
-            <a:pPr algn="l"/>
-            <a:r>
-              <a:rPr lang="ru-RU" b="0" i="0" dirty="0">
-                <a:effectLst/>
-                <a:latin typeface="fkGroteskNeue"/>
-              </a:rPr>
-              <a:t>Байесовские методы:</a:t>
-            </a:r>
-          </a:p>
-          <a:p>
-            <a:pPr algn="l"/>
-            <a:r>
-              <a:rPr lang="ru-RU" b="0" i="0" dirty="0">
-                <a:effectLst/>
-                <a:latin typeface="fkGroteskNeue"/>
-              </a:rPr>
-              <a:t>На малых выборках (редкие болезни) </a:t>
-            </a:r>
-            <a:r>
-              <a:rPr lang="ru-RU" b="0" i="0" dirty="0" err="1">
-                <a:effectLst/>
-                <a:latin typeface="fkGroteskNeue"/>
-              </a:rPr>
-              <a:t>information</a:t>
-            </a:r>
-            <a:r>
-              <a:rPr lang="ru-RU" b="0" i="0" dirty="0">
-                <a:effectLst/>
-                <a:latin typeface="fkGroteskNeue"/>
-              </a:rPr>
-              <a:t> </a:t>
-            </a:r>
-            <a:r>
-              <a:rPr lang="ru-RU" b="0" i="0" dirty="0" err="1">
-                <a:effectLst/>
-                <a:latin typeface="fkGroteskNeue"/>
-              </a:rPr>
-              <a:t>little</a:t>
-            </a:r>
-            <a:r>
-              <a:rPr lang="ru-RU" b="0" i="0" dirty="0">
-                <a:effectLst/>
-                <a:latin typeface="fkGroteskNeue"/>
-              </a:rPr>
-              <a:t>.</a:t>
-            </a:r>
-          </a:p>
-          <a:p>
-            <a:pPr algn="l"/>
-            <a:r>
-              <a:rPr lang="ru-RU" b="0" i="0" dirty="0">
-                <a:effectLst/>
-                <a:latin typeface="fkGroteskNeue"/>
-              </a:rPr>
-              <a:t>Байесовский </a:t>
-            </a:r>
-            <a:r>
-              <a:rPr lang="ru-RU" b="0" i="0" dirty="0" err="1">
-                <a:effectLst/>
-                <a:latin typeface="fkGroteskNeue"/>
-              </a:rPr>
-              <a:t>Cox</a:t>
-            </a:r>
-            <a:r>
-              <a:rPr lang="ru-RU" b="0" i="0" dirty="0">
-                <a:effectLst/>
-                <a:latin typeface="fkGroteskNeue"/>
-              </a:rPr>
-              <a:t> использует </a:t>
-            </a:r>
-            <a:r>
-              <a:rPr lang="ru-RU" b="0" i="0" dirty="0" err="1">
-                <a:effectLst/>
-                <a:latin typeface="fkGroteskNeue"/>
-              </a:rPr>
-              <a:t>prior</a:t>
-            </a:r>
-            <a:r>
-              <a:rPr lang="ru-RU" b="0" i="0" dirty="0">
-                <a:effectLst/>
-                <a:latin typeface="fkGroteskNeue"/>
-              </a:rPr>
-              <a:t> информацию из литературы.</a:t>
-            </a:r>
-          </a:p>
-          <a:p>
-            <a:pPr algn="l"/>
-            <a:r>
-              <a:rPr lang="ru-RU" b="0" i="0" dirty="0">
-                <a:effectLst/>
-                <a:latin typeface="fkGroteskNeue"/>
-              </a:rPr>
-              <a:t>Результат: более стабильные оценки.</a:t>
-            </a:r>
-          </a:p>
-          <a:p>
             <a:endParaRPr lang="ru-RU" sz="1200" b="0" i="0" kern="1200" dirty="0">
               <a:solidFill>
                 <a:schemeClr val="tx1"/>
@@ -6204,74 +2562,6 @@
           <a:bodyPr/>
           <a:lstStyle/>
           <a:p>
-            <a:pPr algn="l"/>
-            <a:r>
-              <a:rPr lang="ru-RU" b="0" i="0" dirty="0">
-                <a:effectLst/>
-                <a:latin typeface="fkGroteskNeue"/>
-              </a:rPr>
-              <a:t>Главное отличие: мы работаем со временем и цензурированием.</a:t>
-            </a:r>
-          </a:p>
-          <a:p>
-            <a:pPr algn="l"/>
-            <a:r>
-              <a:rPr lang="ru-RU" b="0" i="0" dirty="0">
-                <a:effectLst/>
-                <a:latin typeface="fkGroteskNeue"/>
-              </a:rPr>
-              <a:t>Цензурирование: в середине исследования некоторых пациентов "теряем" — они уезжают, выходят из исследования, но событие ещё не произошло.</a:t>
-            </a:r>
-          </a:p>
-          <a:p>
-            <a:pPr algn="l"/>
-            <a:r>
-              <a:rPr lang="ru-RU" b="0" i="0" dirty="0">
-                <a:effectLst/>
-                <a:latin typeface="fkGroteskNeue"/>
-              </a:rPr>
-              <a:t>Наивный подход ("просто посчитаем, сколько % имели событие") будет неправильный, потому что </a:t>
-            </a:r>
-            <a:r>
-              <a:rPr lang="ru-RU" b="0" i="0" dirty="0" err="1">
-                <a:effectLst/>
-                <a:latin typeface="fkGroteskNeue"/>
-              </a:rPr>
-              <a:t>потеренные</a:t>
-            </a:r>
-            <a:r>
-              <a:rPr lang="ru-RU" b="0" i="0" dirty="0">
-                <a:effectLst/>
-                <a:latin typeface="fkGroteskNeue"/>
-              </a:rPr>
-              <a:t> пациенты тоже могли бы иметь события позже.</a:t>
-            </a:r>
-          </a:p>
-          <a:p>
-            <a:pPr algn="l"/>
-            <a:r>
-              <a:rPr lang="ru-RU" b="0" i="0" dirty="0">
-                <a:effectLst/>
-                <a:latin typeface="fkGroteskNeue"/>
-              </a:rPr>
-              <a:t>Это и есть анализ выживаемости (</a:t>
-            </a:r>
-            <a:r>
-              <a:rPr lang="ru-RU" b="0" i="0" dirty="0" err="1">
-                <a:effectLst/>
-                <a:latin typeface="fkGroteskNeue"/>
-              </a:rPr>
-              <a:t>Survival</a:t>
-            </a:r>
-            <a:r>
-              <a:rPr lang="ru-RU" b="0" i="0" dirty="0">
-                <a:effectLst/>
-                <a:latin typeface="fkGroteskNeue"/>
-              </a:rPr>
-              <a:t> Analysis).</a:t>
-            </a:r>
-          </a:p>
-          <a:p>
             <a:endParaRPr lang="ru-RU" sz="1200" b="0" i="0" kern="1200" dirty="0">
               <a:solidFill>
                 <a:schemeClr val="tx1"/>
@@ -6456,178 +2746,6 @@
           <a:bodyPr/>
           <a:lstStyle/>
           <a:p>
-            <a:pPr algn="l"/>
-            <a:r>
-              <a:rPr lang="en-US" b="0" i="0" dirty="0">
-                <a:effectLst/>
-                <a:latin typeface="fkGroteskNeue"/>
-              </a:rPr>
-              <a:t>LASSO </a:t>
-            </a:r>
-            <a:r>
-              <a:rPr lang="ru-RU" b="0" i="0" dirty="0">
-                <a:effectLst/>
-                <a:latin typeface="fkGroteskNeue"/>
-              </a:rPr>
-              <a:t>и </a:t>
-            </a:r>
-            <a:r>
-              <a:rPr lang="en-US" b="0" i="0" dirty="0">
-                <a:effectLst/>
-                <a:latin typeface="fkGroteskNeue"/>
-              </a:rPr>
-              <a:t>Ridge Cox:</a:t>
-            </a:r>
-          </a:p>
-          <a:p>
-            <a:pPr algn="l"/>
-            <a:r>
-              <a:rPr lang="ru-RU" b="0" i="0" dirty="0">
-                <a:effectLst/>
-                <a:latin typeface="fkGroteskNeue"/>
-              </a:rPr>
-              <a:t>При высокой размерности (20,000 генов, 100 пациентов), </a:t>
-            </a:r>
-            <a:r>
-              <a:rPr lang="en-US" b="0" i="0" dirty="0">
-                <a:effectLst/>
-                <a:latin typeface="fkGroteskNeue"/>
-              </a:rPr>
-              <a:t>Cox </a:t>
-            </a:r>
-            <a:r>
-              <a:rPr lang="ru-RU" b="0" i="0" dirty="0">
-                <a:effectLst/>
-                <a:latin typeface="fkGroteskNeue"/>
-              </a:rPr>
-              <a:t>может переобучиться.</a:t>
-            </a:r>
-          </a:p>
-          <a:p>
-            <a:pPr algn="l"/>
-            <a:r>
-              <a:rPr lang="en-US" b="0" i="0" dirty="0">
-                <a:effectLst/>
-                <a:latin typeface="fkGroteskNeue"/>
-              </a:rPr>
-              <a:t>Ridge Cox: </a:t>
-            </a:r>
-            <a:r>
-              <a:rPr lang="ru-RU" b="0" i="0" dirty="0">
-                <a:effectLst/>
-                <a:latin typeface="fkGroteskNeue"/>
-              </a:rPr>
-              <a:t>добавляем </a:t>
-            </a:r>
-            <a:r>
-              <a:rPr lang="en-US" b="0" i="0" dirty="0">
-                <a:effectLst/>
-                <a:latin typeface="fkGroteskNeue"/>
-              </a:rPr>
-              <a:t>L2 </a:t>
-            </a:r>
-            <a:r>
-              <a:rPr lang="ru-RU" b="0" i="0" dirty="0">
-                <a:effectLst/>
-                <a:latin typeface="fkGroteskNeue"/>
-              </a:rPr>
-              <a:t>штраф на </a:t>
-            </a:r>
-            <a:r>
-              <a:rPr lang="el-GR" b="0" i="0" dirty="0">
-                <a:effectLst/>
-                <a:latin typeface="fkGroteskNeue"/>
-              </a:rPr>
-              <a:t>β </a:t>
-            </a:r>
-            <a:r>
-              <a:rPr lang="ru-RU" b="0" i="0" dirty="0">
-                <a:effectLst/>
-                <a:latin typeface="fkGroteskNeue"/>
-              </a:rPr>
-              <a:t>коэффициенты.</a:t>
-            </a:r>
-          </a:p>
-          <a:p>
-            <a:pPr algn="l"/>
-            <a:r>
-              <a:rPr lang="en-US" b="0" i="0" dirty="0">
-                <a:effectLst/>
-                <a:latin typeface="fkGroteskNeue"/>
-              </a:rPr>
-              <a:t>LASSO Cox: L1 </a:t>
-            </a:r>
-            <a:r>
-              <a:rPr lang="ru-RU" b="0" i="0" dirty="0">
-                <a:effectLst/>
-                <a:latin typeface="fkGroteskNeue"/>
-              </a:rPr>
-              <a:t>штраф. Некоторые коэффициенты обнуляются (</a:t>
-            </a:r>
-            <a:r>
-              <a:rPr lang="en-US" b="0" i="0" dirty="0">
-                <a:effectLst/>
-                <a:latin typeface="fkGroteskNeue"/>
-              </a:rPr>
-              <a:t>feature selection).</a:t>
-            </a:r>
-          </a:p>
-          <a:p>
-            <a:pPr algn="l"/>
-            <a:r>
-              <a:rPr lang="ru-RU" b="0" i="0" dirty="0">
-                <a:effectLst/>
-                <a:latin typeface="fkGroteskNeue"/>
-              </a:rPr>
-              <a:t>Пример: 20,000 генов → </a:t>
-            </a:r>
-            <a:r>
-              <a:rPr lang="en-US" b="0" i="0" dirty="0">
-                <a:effectLst/>
-                <a:latin typeface="fkGroteskNeue"/>
-              </a:rPr>
-              <a:t>LASSO </a:t>
-            </a:r>
-            <a:r>
-              <a:rPr lang="ru-RU" b="0" i="0" dirty="0">
-                <a:effectLst/>
-                <a:latin typeface="fkGroteskNeue"/>
-              </a:rPr>
-              <a:t>выбирает 15 генов (остальные </a:t>
-            </a:r>
-            <a:r>
-              <a:rPr lang="el-GR" b="0" i="0" dirty="0">
-                <a:effectLst/>
-                <a:latin typeface="fkGroteskNeue"/>
-              </a:rPr>
-              <a:t>β=0).</a:t>
-            </a:r>
-          </a:p>
-          <a:p>
-            <a:pPr algn="l"/>
-            <a:r>
-              <a:rPr lang="ru-RU" b="0" i="0" dirty="0">
-                <a:effectLst/>
-                <a:latin typeface="fkGroteskNeue"/>
-              </a:rPr>
-              <a:t>Модель </a:t>
-            </a:r>
-            <a:r>
-              <a:rPr lang="ru-RU" b="0" i="0" dirty="0" err="1">
-                <a:effectLst/>
-                <a:latin typeface="fkGroteskNeue"/>
-              </a:rPr>
-              <a:t>интерпретируемее</a:t>
-            </a:r>
-            <a:r>
-              <a:rPr lang="ru-RU" b="0" i="0" dirty="0">
-                <a:effectLst/>
-                <a:latin typeface="fkGroteskNeue"/>
-              </a:rPr>
-              <a:t> и, часто, не теряет в качестве.</a:t>
-            </a:r>
-          </a:p>
-          <a:p>
             <a:endParaRPr lang="ru-RU" sz="1200" b="0" i="0" kern="1200" dirty="0">
               <a:solidFill>
                 <a:schemeClr val="tx1"/>
@@ -6813,386 +2931,6 @@
           <a:lstStyle/>
           <a:p>
             <a:pPr algn="l"/>
-            <a:r>
-              <a:rPr lang="ru-RU" b="0" i="0" dirty="0">
-                <a:solidFill>
-                  <a:srgbClr val="4D4D4C"/>
-                </a:solidFill>
-                <a:effectLst/>
-                <a:latin typeface="pplxSansMono"/>
-              </a:rPr>
-              <a:t>Отличный пример реального применения всего, что мы прошли: статья 2022 года по аденокарциноме лёгкого из </a:t>
-            </a:r>
-            <a:r>
-              <a:rPr lang="en-US" b="0" i="0" dirty="0">
-                <a:solidFill>
-                  <a:srgbClr val="4D4D4C"/>
-                </a:solidFill>
-                <a:effectLst/>
-                <a:latin typeface="pplxSansMono"/>
-              </a:rPr>
-              <a:t>TCGA.[page:182] </a:t>
-            </a:r>
-            <a:r>
-              <a:rPr lang="ru-RU" b="0" i="0" dirty="0">
-                <a:solidFill>
-                  <a:srgbClr val="4D4D4C"/>
-                </a:solidFill>
-                <a:effectLst/>
-                <a:latin typeface="pplxSansMono"/>
-              </a:rPr>
-              <a:t>Авторы берут </a:t>
-            </a:r>
-            <a:r>
-              <a:rPr lang="en-US" b="0" i="0" dirty="0">
-                <a:solidFill>
-                  <a:srgbClr val="4D4D4C"/>
-                </a:solidFill>
-                <a:effectLst/>
-                <a:latin typeface="pplxSansMono"/>
-              </a:rPr>
-              <a:t>mRNA‑</a:t>
-            </a:r>
-            <a:r>
-              <a:rPr lang="ru-RU" b="0" i="0" dirty="0">
-                <a:solidFill>
-                  <a:srgbClr val="4D4D4C"/>
-                </a:solidFill>
-                <a:effectLst/>
-                <a:latin typeface="pplxSansMono"/>
-              </a:rPr>
-              <a:t>данные 470 пациентов + клинику (</a:t>
-            </a:r>
-            <a:r>
-              <a:rPr lang="en-US" b="0" i="0" dirty="0">
-                <a:solidFill>
-                  <a:srgbClr val="4D4D4C"/>
-                </a:solidFill>
-                <a:effectLst/>
-                <a:latin typeface="pplxSansMono"/>
-              </a:rPr>
-              <a:t>T/N/M, </a:t>
-            </a:r>
-            <a:r>
-              <a:rPr lang="ru-RU" b="0" i="0" dirty="0">
-                <a:solidFill>
-                  <a:srgbClr val="4D4D4C"/>
-                </a:solidFill>
-                <a:effectLst/>
-                <a:latin typeface="pplxSansMono"/>
-              </a:rPr>
-              <a:t>стадия, лечение). Сначала </a:t>
-            </a:r>
-            <a:r>
-              <a:rPr lang="en-US" b="0" i="0" dirty="0">
-                <a:solidFill>
-                  <a:srgbClr val="4D4D4C"/>
-                </a:solidFill>
-                <a:effectLst/>
-                <a:latin typeface="pplxSansMono"/>
-              </a:rPr>
-              <a:t>GSEA → 165 </a:t>
-            </a:r>
-            <a:r>
-              <a:rPr lang="ru-RU" b="0" i="0" dirty="0">
-                <a:solidFill>
-                  <a:srgbClr val="4D4D4C"/>
-                </a:solidFill>
-                <a:effectLst/>
-                <a:latin typeface="pplxSansMono"/>
-              </a:rPr>
-              <a:t>генов, </a:t>
-            </a:r>
-            <a:r>
-              <a:rPr lang="en-US" b="0" i="0" dirty="0">
-                <a:solidFill>
-                  <a:srgbClr val="4D4D4C"/>
-                </a:solidFill>
-                <a:effectLst/>
-                <a:latin typeface="pplxSansMono"/>
-              </a:rPr>
-              <a:t>univariate Cox → 87 </a:t>
-            </a:r>
-            <a:r>
-              <a:rPr lang="ru-RU" b="0" i="0" dirty="0">
-                <a:solidFill>
-                  <a:srgbClr val="4D4D4C"/>
-                </a:solidFill>
-                <a:effectLst/>
-                <a:latin typeface="pplxSansMono"/>
-              </a:rPr>
-              <a:t>кандидатов. Затем **новинка — </a:t>
-            </a:r>
-            <a:r>
-              <a:rPr lang="en-US" b="0" i="0" dirty="0">
-                <a:solidFill>
-                  <a:srgbClr val="4D4D4C"/>
-                </a:solidFill>
-                <a:effectLst/>
-                <a:latin typeface="pplxSansMono"/>
-              </a:rPr>
-              <a:t>Bayesian hierarchical Cox** (</a:t>
-            </a:r>
-            <a:r>
-              <a:rPr lang="ru-RU" b="0" i="0" dirty="0">
-                <a:solidFill>
-                  <a:srgbClr val="4D4D4C"/>
-                </a:solidFill>
-                <a:effectLst/>
-                <a:latin typeface="pplxSansMono"/>
-              </a:rPr>
-              <a:t>лучше </a:t>
-            </a:r>
-            <a:r>
-              <a:rPr lang="en-US" b="0" i="0" dirty="0">
-                <a:solidFill>
-                  <a:srgbClr val="4D4D4C"/>
-                </a:solidFill>
-                <a:effectLst/>
-                <a:latin typeface="pplxSansMono"/>
-              </a:rPr>
-              <a:t>LASSO): spike-and-slab prior, C-index 0.651. </a:t>
-            </a:r>
-            <a:r>
-              <a:rPr lang="ru-RU" b="0" i="0" dirty="0">
-                <a:solidFill>
-                  <a:srgbClr val="4D4D4C"/>
-                </a:solidFill>
-                <a:effectLst/>
-                <a:latin typeface="pplxSansMono"/>
-              </a:rPr>
-              <a:t>Получают 14‑генную сигнатуру: </a:t>
-            </a:r>
-            <a:r>
-              <a:rPr lang="en-US" b="0" i="0" dirty="0">
-                <a:solidFill>
-                  <a:srgbClr val="4D4D4C"/>
-                </a:solidFill>
-                <a:effectLst/>
-                <a:latin typeface="pplxSansMono"/>
-              </a:rPr>
-              <a:t>CPS1, MCM5/7, PLK1 </a:t>
-            </a:r>
-            <a:r>
-              <a:rPr lang="ru-RU" b="0" i="0" dirty="0">
-                <a:solidFill>
-                  <a:srgbClr val="4D4D4C"/>
-                </a:solidFill>
-                <a:effectLst/>
-                <a:latin typeface="pplxSansMono"/>
-              </a:rPr>
-              <a:t>и др. </a:t>
-            </a:r>
-            <a:r>
-              <a:rPr lang="en-US" b="0" i="0" dirty="0">
-                <a:solidFill>
-                  <a:srgbClr val="4D4D4C"/>
-                </a:solidFill>
-                <a:effectLst/>
-                <a:latin typeface="pplxSansMono"/>
-              </a:rPr>
-              <a:t>Risk score = </a:t>
-            </a:r>
-            <a:r>
-              <a:rPr lang="el-GR" b="0" i="0" dirty="0">
-                <a:solidFill>
-                  <a:srgbClr val="4D4D4C"/>
-                </a:solidFill>
-                <a:effectLst/>
-                <a:latin typeface="pplxSansMono"/>
-              </a:rPr>
-              <a:t>Σ(</a:t>
-            </a:r>
-            <a:r>
-              <a:rPr lang="en-US" b="0" i="0" dirty="0" err="1">
-                <a:solidFill>
-                  <a:srgbClr val="4D4D4C"/>
-                </a:solidFill>
-                <a:effectLst/>
-                <a:latin typeface="pplxSansMono"/>
-              </a:rPr>
-              <a:t>coef</a:t>
-            </a:r>
-            <a:r>
-              <a:rPr lang="en-US" b="0" i="0" dirty="0">
-                <a:solidFill>
-                  <a:srgbClr val="4D4D4C"/>
-                </a:solidFill>
-                <a:effectLst/>
-                <a:latin typeface="pplxSansMono"/>
-              </a:rPr>
-              <a:t> × expr), </a:t>
-            </a:r>
-            <a:r>
-              <a:rPr lang="ru-RU" b="0" i="0" dirty="0">
-                <a:solidFill>
-                  <a:srgbClr val="4D4D4C"/>
-                </a:solidFill>
-                <a:effectLst/>
-                <a:latin typeface="pplxSansMono"/>
-              </a:rPr>
-              <a:t>делят по медиане на </a:t>
-            </a:r>
-            <a:r>
-              <a:rPr lang="en-US" b="0" i="0" dirty="0">
-                <a:solidFill>
-                  <a:srgbClr val="4D4D4C"/>
-                </a:solidFill>
-                <a:effectLst/>
-                <a:latin typeface="pplxSansMono"/>
-              </a:rPr>
-              <a:t>High/Low. KM‑</a:t>
-            </a:r>
-            <a:r>
-              <a:rPr lang="ru-RU" b="0" i="0" dirty="0">
-                <a:solidFill>
-                  <a:srgbClr val="4D4D4C"/>
-                </a:solidFill>
-                <a:effectLst/>
-                <a:latin typeface="pplxSansMono"/>
-              </a:rPr>
-              <a:t>кривая показывает </a:t>
-            </a:r>
-            <a:r>
-              <a:rPr lang="en-US" b="0" i="0" dirty="0">
-                <a:solidFill>
-                  <a:srgbClr val="4D4D4C"/>
-                </a:solidFill>
-                <a:effectLst/>
-                <a:latin typeface="pplxSansMono"/>
-              </a:rPr>
-              <a:t>p&lt;0.001, AUC 0.69. </a:t>
-            </a:r>
-            <a:r>
-              <a:rPr lang="ru-RU" b="0" i="0" dirty="0">
-                <a:solidFill>
-                  <a:srgbClr val="4D4D4C"/>
-                </a:solidFill>
-                <a:effectLst/>
-                <a:latin typeface="pplxSansMono"/>
-              </a:rPr>
-              <a:t>Валидация на </a:t>
-            </a:r>
-            <a:r>
-              <a:rPr lang="en-US" b="0" i="0" dirty="0">
-                <a:solidFill>
-                  <a:srgbClr val="4D4D4C"/>
-                </a:solidFill>
-                <a:effectLst/>
-                <a:latin typeface="pplxSansMono"/>
-              </a:rPr>
-              <a:t>GEO — C-index 0.735![page:182] </a:t>
-            </a:r>
-            <a:r>
-              <a:rPr lang="ru-RU" b="0" i="0" dirty="0">
-                <a:solidFill>
-                  <a:srgbClr val="4D4D4C"/>
-                </a:solidFill>
-                <a:effectLst/>
-                <a:latin typeface="pplxSansMono"/>
-              </a:rPr>
-              <a:t>Многофакторная </a:t>
-            </a:r>
-            <a:r>
-              <a:rPr lang="en-US" b="0" i="0" dirty="0">
-                <a:solidFill>
-                  <a:srgbClr val="4D4D4C"/>
-                </a:solidFill>
-                <a:effectLst/>
-                <a:latin typeface="pplxSansMono"/>
-              </a:rPr>
-              <a:t>Cox: risk score HR=3.96 </a:t>
-            </a:r>
-            <a:r>
-              <a:rPr lang="ru-RU" b="0" i="0" dirty="0">
-                <a:solidFill>
-                  <a:srgbClr val="4D4D4C"/>
-                </a:solidFill>
-                <a:effectLst/>
-                <a:latin typeface="pplxSansMono"/>
-              </a:rPr>
-              <a:t>доминирует над стадией. Строят номограмму для 3/5/10‑летней </a:t>
-            </a:r>
-            <a:r>
-              <a:rPr lang="en-US" b="0" i="0" dirty="0">
-                <a:solidFill>
-                  <a:srgbClr val="4D4D4C"/>
-                </a:solidFill>
-                <a:effectLst/>
-                <a:latin typeface="pplxSansMono"/>
-              </a:rPr>
-              <a:t>OS. </a:t>
-            </a:r>
-            <a:r>
-              <a:rPr lang="ru-RU" b="0" i="0" dirty="0">
-                <a:solidFill>
-                  <a:srgbClr val="4D4D4C"/>
-                </a:solidFill>
-                <a:effectLst/>
-                <a:latin typeface="pplxSansMono"/>
-              </a:rPr>
-              <a:t>Бонус: находят новые гены </a:t>
-            </a:r>
-            <a:r>
-              <a:rPr lang="en-US" b="0" i="0" dirty="0">
-                <a:solidFill>
-                  <a:srgbClr val="4D4D4C"/>
-                </a:solidFill>
-                <a:effectLst/>
-                <a:latin typeface="pplxSansMono"/>
-              </a:rPr>
-              <a:t>CTPS2/DARS2, ↑ </a:t>
-            </a:r>
-            <a:r>
-              <a:rPr lang="ru-RU" b="0" i="0" dirty="0">
-                <a:solidFill>
-                  <a:srgbClr val="4D4D4C"/>
-                </a:solidFill>
-                <a:effectLst/>
-                <a:latin typeface="pplxSansMono"/>
-              </a:rPr>
-              <a:t>в опухолях, потенциальные мишени. Это **шаблон для практики**: </a:t>
-            </a:r>
-            <a:r>
-              <a:rPr lang="en-US" b="0" i="0" dirty="0">
-                <a:solidFill>
-                  <a:srgbClr val="4D4D4C"/>
-                </a:solidFill>
-                <a:effectLst/>
-                <a:latin typeface="pplxSansMono"/>
-              </a:rPr>
-              <a:t>TCGA → </a:t>
-            </a:r>
-            <a:r>
-              <a:rPr lang="ru-RU" b="0" i="0" dirty="0">
-                <a:solidFill>
-                  <a:srgbClr val="4D4D4C"/>
-                </a:solidFill>
-                <a:effectLst/>
-                <a:latin typeface="pplxSansMono"/>
-              </a:rPr>
-              <a:t>отбор → </a:t>
-            </a:r>
-            <a:r>
-              <a:rPr lang="en-US" b="0" i="0" dirty="0">
-                <a:solidFill>
-                  <a:srgbClr val="4D4D4C"/>
-                </a:solidFill>
-                <a:effectLst/>
-                <a:latin typeface="pplxSansMono"/>
-              </a:rPr>
-              <a:t>Cox → risk score → </a:t>
-            </a:r>
-            <a:r>
-              <a:rPr lang="ru-RU" b="0" i="0" dirty="0">
-                <a:solidFill>
-                  <a:srgbClr val="4D4D4C"/>
-                </a:solidFill>
-                <a:effectLst/>
-                <a:latin typeface="pplxSansMono"/>
-              </a:rPr>
-              <a:t>номограмма → публикация</a:t>
-            </a:r>
             <a:endParaRPr lang="ru-RU" sz="1200" b="0" i="0" kern="1200" dirty="0">
               <a:solidFill>
                 <a:schemeClr val="tx1"/>
@@ -7285,241 +3023,6 @@
           <a:bodyPr/>
           <a:lstStyle/>
           <a:p>
-            <a:pPr algn="l"/>
-            <a:r>
-              <a:rPr lang="ru-RU" b="0" i="0" dirty="0">
-                <a:effectLst/>
-                <a:latin typeface="fkGroteskNeue"/>
-              </a:rPr>
-              <a:t>ИТОГИ:</a:t>
-            </a:r>
-          </a:p>
-          <a:p>
-            <a:pPr algn="l"/>
-            <a:r>
-              <a:rPr lang="ru-RU" b="0" i="0" dirty="0">
-                <a:effectLst/>
-                <a:latin typeface="fkGroteskNeue"/>
-              </a:rPr>
-              <a:t>✓ Анализ выживаемости необходим в медицине</a:t>
-            </a:r>
-            <a:br>
-              <a:rPr lang="ru-RU" b="0" i="0" dirty="0">
-                <a:effectLst/>
-                <a:latin typeface="fkGroteskNeue"/>
-              </a:rPr>
-            </a:br>
-            <a:r>
-              <a:rPr lang="ru-RU" b="0" i="0" dirty="0">
-                <a:effectLst/>
-                <a:latin typeface="fkGroteskNeue"/>
-              </a:rPr>
-              <a:t>✓ </a:t>
-            </a:r>
-            <a:r>
-              <a:rPr lang="ru-RU" b="0" i="0" dirty="0" err="1">
-                <a:effectLst/>
-                <a:latin typeface="fkGroteskNeue"/>
-              </a:rPr>
-              <a:t>Kaplан</a:t>
-            </a:r>
-            <a:r>
-              <a:rPr lang="ru-RU" b="0" i="0" dirty="0">
-                <a:effectLst/>
-                <a:latin typeface="fkGroteskNeue"/>
-              </a:rPr>
-              <a:t>-Мейер для сравнения групп</a:t>
-            </a:r>
-            <a:br>
-              <a:rPr lang="ru-RU" b="0" i="0" dirty="0">
-                <a:effectLst/>
-                <a:latin typeface="fkGroteskNeue"/>
-              </a:rPr>
-            </a:br>
-            <a:r>
-              <a:rPr lang="ru-RU" b="0" i="0" dirty="0">
-                <a:effectLst/>
-                <a:latin typeface="fkGroteskNeue"/>
-              </a:rPr>
-              <a:t>✓ </a:t>
-            </a:r>
-            <a:r>
-              <a:rPr lang="ru-RU" b="0" i="0" dirty="0" err="1">
-                <a:effectLst/>
-                <a:latin typeface="fkGroteskNeue"/>
-              </a:rPr>
-              <a:t>Cox</a:t>
-            </a:r>
-            <a:r>
-              <a:rPr lang="ru-RU" b="0" i="0" dirty="0">
-                <a:effectLst/>
-                <a:latin typeface="fkGroteskNeue"/>
-              </a:rPr>
-              <a:t> </a:t>
-            </a:r>
-            <a:r>
-              <a:rPr lang="ru-RU" b="0" i="0" dirty="0" err="1">
-                <a:effectLst/>
-                <a:latin typeface="fkGroteskNeue"/>
-              </a:rPr>
-              <a:t>model</a:t>
-            </a:r>
-            <a:r>
-              <a:rPr lang="ru-RU" b="0" i="0" dirty="0">
-                <a:effectLst/>
-                <a:latin typeface="fkGroteskNeue"/>
-              </a:rPr>
-              <a:t> для </a:t>
-            </a:r>
-            <a:r>
-              <a:rPr lang="ru-RU" b="0" i="0" dirty="0" err="1">
-                <a:effectLst/>
-                <a:latin typeface="fkGroteskNeue"/>
-              </a:rPr>
-              <a:t>мультивариатного</a:t>
-            </a:r>
-            <a:r>
-              <a:rPr lang="ru-RU" b="0" i="0" dirty="0">
-                <a:effectLst/>
-                <a:latin typeface="fkGroteskNeue"/>
-              </a:rPr>
-              <a:t> анализа</a:t>
-            </a:r>
-            <a:br>
-              <a:rPr lang="ru-RU" b="0" i="0" dirty="0">
-                <a:effectLst/>
-                <a:latin typeface="fkGroteskNeue"/>
-              </a:rPr>
-            </a:br>
-            <a:r>
-              <a:rPr lang="ru-RU" b="0" i="0" dirty="0">
-                <a:effectLst/>
-                <a:latin typeface="fkGroteskNeue"/>
-              </a:rPr>
-              <a:t>✓ </a:t>
-            </a:r>
-            <a:r>
-              <a:rPr lang="ru-RU" b="0" i="0" dirty="0" err="1">
-                <a:effectLst/>
-                <a:latin typeface="fkGroteskNeue"/>
-              </a:rPr>
-              <a:t>Hazard</a:t>
-            </a:r>
-            <a:r>
-              <a:rPr lang="ru-RU" b="0" i="0" dirty="0">
-                <a:effectLst/>
-                <a:latin typeface="fkGroteskNeue"/>
-              </a:rPr>
-              <a:t> </a:t>
-            </a:r>
-            <a:r>
-              <a:rPr lang="ru-RU" b="0" i="0" dirty="0" err="1">
-                <a:effectLst/>
-                <a:latin typeface="fkGroteskNeue"/>
-              </a:rPr>
-              <a:t>Ratio</a:t>
-            </a:r>
-            <a:r>
-              <a:rPr lang="ru-RU" b="0" i="0" dirty="0">
-                <a:effectLst/>
-                <a:latin typeface="fkGroteskNeue"/>
-              </a:rPr>
-              <a:t> для интерпретации</a:t>
-            </a:r>
-            <a:br>
-              <a:rPr lang="ru-RU" b="0" i="0" dirty="0">
-                <a:effectLst/>
-                <a:latin typeface="fkGroteskNeue"/>
-              </a:rPr>
-            </a:br>
-            <a:r>
-              <a:rPr lang="ru-RU" b="0" i="0" dirty="0">
-                <a:effectLst/>
-                <a:latin typeface="fkGroteskNeue"/>
-              </a:rPr>
-              <a:t>✓ C-</a:t>
-            </a:r>
-            <a:r>
-              <a:rPr lang="ru-RU" b="0" i="0" dirty="0" err="1">
-                <a:effectLst/>
-                <a:latin typeface="fkGroteskNeue"/>
-              </a:rPr>
-              <a:t>index</a:t>
-            </a:r>
-            <a:r>
-              <a:rPr lang="ru-RU" b="0" i="0" dirty="0">
-                <a:effectLst/>
-                <a:latin typeface="fkGroteskNeue"/>
-              </a:rPr>
-              <a:t> для оценки качества</a:t>
-            </a:r>
-            <a:br>
-              <a:rPr lang="ru-RU" b="0" i="0" dirty="0">
-                <a:effectLst/>
-                <a:latin typeface="fkGroteskNeue"/>
-              </a:rPr>
-            </a:br>
-            <a:r>
-              <a:rPr lang="ru-RU" b="0" i="0" dirty="0">
-                <a:effectLst/>
-                <a:latin typeface="fkGroteskNeue"/>
-              </a:rPr>
-              <a:t>✓ Валидация на независимой выборке</a:t>
-            </a:r>
-          </a:p>
-          <a:p>
-            <a:pPr algn="l"/>
-            <a:r>
-              <a:rPr lang="ru-RU" b="0" i="0" dirty="0">
-                <a:effectLst/>
-                <a:latin typeface="fkGroteskNeue"/>
-              </a:rPr>
-              <a:t>Дальше: практика. Вы будете строить </a:t>
-            </a:r>
-            <a:r>
-              <a:rPr lang="ru-RU" b="0" i="0" dirty="0" err="1">
-                <a:effectLst/>
-                <a:latin typeface="fkGroteskNeue"/>
-              </a:rPr>
-              <a:t>Cox</a:t>
-            </a:r>
-            <a:r>
-              <a:rPr lang="ru-RU" b="0" i="0" dirty="0">
-                <a:effectLst/>
-                <a:latin typeface="fkGroteskNeue"/>
-              </a:rPr>
-              <a:t> </a:t>
-            </a:r>
-            <a:r>
-              <a:rPr lang="ru-RU" b="0" i="0" dirty="0" err="1">
-                <a:effectLst/>
-                <a:latin typeface="fkGroteskNeue"/>
-              </a:rPr>
-              <a:t>model</a:t>
-            </a:r>
-            <a:r>
-              <a:rPr lang="ru-RU" b="0" i="0" dirty="0">
-                <a:effectLst/>
-                <a:latin typeface="fkGroteskNeue"/>
-              </a:rPr>
-              <a:t> на реальных данных (</a:t>
-            </a:r>
-            <a:r>
-              <a:rPr lang="ru-RU" b="0" i="0" dirty="0" err="1">
-                <a:effectLst/>
-                <a:latin typeface="fkGroteskNeue"/>
-              </a:rPr>
-              <a:t>датасет</a:t>
-            </a:r>
-            <a:r>
-              <a:rPr lang="ru-RU" b="0" i="0" dirty="0">
-                <a:effectLst/>
-                <a:latin typeface="fkGroteskNeue"/>
-              </a:rPr>
-              <a:t> NCBI, например, TCGA или публичные клинические данные).</a:t>
-            </a:r>
-          </a:p>
-          <a:p>
             <a:endParaRPr lang="ru-RU" sz="1200" b="0" i="0" kern="1200" dirty="0">
               <a:solidFill>
                 <a:schemeClr val="tx1"/>
@@ -7788,85 +3291,6 @@
           <a:bodyPr/>
           <a:lstStyle/>
           <a:p>
-            <a:pPr algn="l"/>
-            <a:r>
-              <a:rPr lang="ru-RU" b="0" i="0" dirty="0">
-                <a:effectLst/>
-                <a:latin typeface="fkGroteskNeue"/>
-              </a:rPr>
-              <a:t>S(t) — функция выживаемости:</a:t>
-            </a:r>
-          </a:p>
-          <a:p>
-            <a:pPr algn="l"/>
-            <a:r>
-              <a:rPr lang="ru-RU" b="0" i="0" dirty="0">
-                <a:effectLst/>
-                <a:latin typeface="fkGroteskNeue"/>
-              </a:rPr>
-              <a:t>Это вероятность того, что пациент "выживет" (не будет события) до времени t.</a:t>
-            </a:r>
-          </a:p>
-          <a:p>
-            <a:pPr algn="l"/>
-            <a:r>
-              <a:rPr lang="ru-RU" b="0" i="0" dirty="0">
-                <a:effectLst/>
-                <a:latin typeface="fkGroteskNeue"/>
-              </a:rPr>
-              <a:t>S(t) = P(время события &gt; t)</a:t>
-            </a:r>
-          </a:p>
-          <a:p>
-            <a:pPr algn="l"/>
-            <a:r>
-              <a:rPr lang="ru-RU" b="0" i="0" dirty="0">
-                <a:effectLst/>
-                <a:latin typeface="fkGroteskNeue"/>
-              </a:rPr>
-              <a:t>Пример: рак молочной железы</a:t>
-            </a:r>
-          </a:p>
-          <a:p>
-            <a:pPr algn="l">
-              <a:buFont typeface="Arial" panose="020B0604020202020204" pitchFamily="34" charset="0"/>
-              <a:buChar char="•"/>
-            </a:pPr>
-            <a:r>
-              <a:rPr lang="ru-RU" b="0" i="0" dirty="0">
-                <a:effectLst/>
-                <a:latin typeface="fkGroteskNeue"/>
-              </a:rPr>
-              <a:t>S(1) = 0.98 → 98% живы через год</a:t>
-            </a:r>
-          </a:p>
-          <a:p>
-            <a:pPr algn="l">
-              <a:buFont typeface="Arial" panose="020B0604020202020204" pitchFamily="34" charset="0"/>
-              <a:buChar char="•"/>
-            </a:pPr>
-            <a:r>
-              <a:rPr lang="ru-RU" b="0" i="0" dirty="0">
-                <a:effectLst/>
-                <a:latin typeface="fkGroteskNeue"/>
-              </a:rPr>
-              <a:t>S(5) = 0.75 → 75% живы через 5 лет (это общее выживание)</a:t>
-            </a:r>
-          </a:p>
-          <a:p>
-            <a:pPr algn="l">
-              <a:buFont typeface="Arial" panose="020B0604020202020204" pitchFamily="34" charset="0"/>
-              <a:buChar char="•"/>
-            </a:pPr>
-            <a:r>
-              <a:rPr lang="ru-RU" b="0" i="0" dirty="0">
-                <a:effectLst/>
-                <a:latin typeface="fkGroteskNeue"/>
-              </a:rPr>
-              <a:t>S(10) = 0.50 → через 10 лет живы 50% пациентов</a:t>
-            </a:r>
-          </a:p>
-          <a:p>
             <a:endParaRPr lang="ru-RU" sz="1200" b="0" i="0" kern="1200" dirty="0">
               <a:solidFill>
                 <a:schemeClr val="tx1"/>
@@ -7959,64 +3383,6 @@
           <a:bodyPr/>
           <a:lstStyle/>
           <a:p>
-            <a:pPr algn="l"/>
-            <a:r>
-              <a:rPr lang="ru-RU" b="0" i="0" dirty="0">
-                <a:effectLst/>
-                <a:latin typeface="fkGroteskNeue"/>
-              </a:rPr>
-              <a:t>h(t) — функция опасности (</a:t>
-            </a:r>
-            <a:r>
-              <a:rPr lang="ru-RU" b="0" i="0" dirty="0" err="1">
-                <a:effectLst/>
-                <a:latin typeface="fkGroteskNeue"/>
-              </a:rPr>
-              <a:t>hazard</a:t>
-            </a:r>
-            <a:r>
-              <a:rPr lang="ru-RU" b="0" i="0" dirty="0">
-                <a:effectLst/>
-                <a:latin typeface="fkGroteskNeue"/>
-              </a:rPr>
-              <a:t> </a:t>
-            </a:r>
-            <a:r>
-              <a:rPr lang="ru-RU" b="0" i="0" dirty="0" err="1">
-                <a:effectLst/>
-                <a:latin typeface="fkGroteskNeue"/>
-              </a:rPr>
-              <a:t>function</a:t>
-            </a:r>
-            <a:r>
-              <a:rPr lang="ru-RU" b="0" i="0" dirty="0">
-                <a:effectLst/>
-                <a:latin typeface="fkGroteskNeue"/>
-              </a:rPr>
-              <a:t>):</a:t>
-            </a:r>
-          </a:p>
-          <a:p>
-            <a:pPr algn="l"/>
-            <a:r>
-              <a:rPr lang="ru-RU" b="0" i="0" dirty="0">
-                <a:effectLst/>
-                <a:latin typeface="fkGroteskNeue"/>
-              </a:rPr>
-              <a:t>Это "мгновенный риск" события в момент t, учитывая, что пациент дожил до t.</a:t>
-            </a:r>
-          </a:p>
-          <a:p>
-            <a:pPr algn="l"/>
-            <a:r>
-              <a:rPr lang="ru-RU" b="0" i="0" dirty="0">
-                <a:effectLst/>
-                <a:latin typeface="fkGroteskNeue"/>
-              </a:rPr>
-              <a:t>Связана с S(t): чем больше h(t), тем быстрее падает S(t).</a:t>
-            </a:r>
-          </a:p>
-          <a:p>
             <a:endParaRPr lang="ru-RU" sz="1200" b="0" i="0" kern="1200" dirty="0">
               <a:solidFill>
                 <a:schemeClr val="tx1"/>
@@ -8109,85 +3475,6 @@
           <a:bodyPr/>
           <a:lstStyle/>
           <a:p>
-            <a:pPr algn="l"/>
-            <a:r>
-              <a:rPr lang="ru-RU" b="0" i="0" dirty="0">
-                <a:effectLst/>
-                <a:latin typeface="fkGroteskNeue"/>
-              </a:rPr>
-              <a:t>Кривая Каплана-Мейера:</a:t>
-            </a:r>
-          </a:p>
-          <a:p>
-            <a:pPr algn="l"/>
-            <a:r>
-              <a:rPr lang="ru-RU" b="0" i="0" dirty="0">
-                <a:effectLst/>
-                <a:latin typeface="fkGroteskNeue"/>
-              </a:rPr>
-              <a:t>Это эмпирическая (основанная на данных) оценка S(t).</a:t>
-            </a:r>
-          </a:p>
-          <a:p>
-            <a:pPr algn="l"/>
-            <a:r>
-              <a:rPr lang="ru-RU" b="0" i="0" dirty="0">
-                <a:effectLst/>
-                <a:latin typeface="fkGroteskNeue"/>
-              </a:rPr>
-              <a:t>Как она вычисляется:</a:t>
-            </a:r>
-          </a:p>
-          <a:p>
-            <a:pPr algn="l"/>
-            <a:r>
-              <a:rPr lang="ru-RU" b="0" i="0" dirty="0">
-                <a:effectLst/>
-                <a:latin typeface="fkGroteskNeue"/>
-              </a:rPr>
-              <a:t>На каждый момент времени t, когда происходит событие:</a:t>
-            </a:r>
-          </a:p>
-          <a:p>
-            <a:pPr algn="l">
-              <a:buFont typeface="Arial" panose="020B0604020202020204" pitchFamily="34" charset="0"/>
-              <a:buChar char="•"/>
-            </a:pPr>
-            <a:r>
-              <a:rPr lang="ru-RU" b="0" i="0" dirty="0">
-                <a:effectLst/>
-                <a:latin typeface="fkGroteskNeue"/>
-              </a:rPr>
-              <a:t>S(t) = S(t-) × (1 - d/n)</a:t>
-            </a:r>
-          </a:p>
-          <a:p>
-            <a:pPr algn="l">
-              <a:buFont typeface="Arial" panose="020B0604020202020204" pitchFamily="34" charset="0"/>
-              <a:buChar char="•"/>
-            </a:pPr>
-            <a:r>
-              <a:rPr lang="ru-RU" b="0" i="0" dirty="0">
-                <a:effectLst/>
-                <a:latin typeface="fkGroteskNeue"/>
-              </a:rPr>
-              <a:t>d = число событий в момент t</a:t>
-            </a:r>
-          </a:p>
-          <a:p>
-            <a:pPr algn="l">
-              <a:buFont typeface="Arial" panose="020B0604020202020204" pitchFamily="34" charset="0"/>
-              <a:buChar char="•"/>
-            </a:pPr>
-            <a:r>
-              <a:rPr lang="ru-RU" b="0" i="0" dirty="0">
-                <a:effectLst/>
-                <a:latin typeface="fkGroteskNeue"/>
-              </a:rPr>
-              <a:t>n = число пациентов в "группе риска" (живы и не цензурированы к моменту t)</a:t>
-            </a:r>
-          </a:p>
-          <a:p>
             <a:endParaRPr lang="ru-RU" sz="1200" b="0" i="0" kern="1200" dirty="0">
               <a:solidFill>
                 <a:schemeClr val="tx1"/>
@@ -8280,132 +3567,6 @@
           <a:bodyPr/>
           <a:lstStyle/>
           <a:p>
-            <a:pPr algn="l"/>
-            <a:r>
-              <a:rPr lang="ru-RU" b="0" i="0" dirty="0">
-                <a:effectLst/>
-                <a:latin typeface="fkGroteskNeue"/>
-              </a:rPr>
-              <a:t>Пример:</a:t>
-            </a:r>
-          </a:p>
-          <a:p>
-            <a:pPr algn="l">
-              <a:buFont typeface="Arial" panose="020B0604020202020204" pitchFamily="34" charset="0"/>
-              <a:buChar char="•"/>
-            </a:pPr>
-            <a:r>
-              <a:rPr lang="ru-RU" b="0" i="0" dirty="0">
-                <a:effectLst/>
-                <a:latin typeface="fkGroteskNeue"/>
-              </a:rPr>
-              <a:t>День 0: 100 пациентов, S(0) = 1.0</a:t>
-            </a:r>
-          </a:p>
-          <a:p>
-            <a:pPr algn="l">
-              <a:buFont typeface="Arial" panose="020B0604020202020204" pitchFamily="34" charset="0"/>
-              <a:buChar char="•"/>
-            </a:pPr>
-            <a:r>
-              <a:rPr lang="ru-RU" b="0" i="0" dirty="0">
-                <a:effectLst/>
-                <a:latin typeface="fkGroteskNeue"/>
-              </a:rPr>
-              <a:t>День 100: 2 события, 98 в группе риска, S(100) = 1.0 × (1 - 2/100) = 0.98</a:t>
-            </a:r>
-          </a:p>
-          <a:p>
-            <a:pPr algn="l">
-              <a:buFont typeface="Arial" panose="020B0604020202020204" pitchFamily="34" charset="0"/>
-              <a:buChar char="•"/>
-            </a:pPr>
-            <a:r>
-              <a:rPr lang="ru-RU" b="0" i="0" dirty="0">
-                <a:effectLst/>
-                <a:latin typeface="fkGroteskNeue"/>
-              </a:rPr>
-              <a:t>День 200: 3 события, 95 в группе риска, S(200) = 0.98 × (1 - 3/95) = 0.966</a:t>
-            </a:r>
-          </a:p>
-          <a:p>
-            <a:pPr algn="l">
-              <a:buFont typeface="Arial" panose="020B0604020202020204" pitchFamily="34" charset="0"/>
-              <a:buChar char="•"/>
-            </a:pPr>
-            <a:r>
-              <a:rPr lang="ru-RU" b="0" i="0" dirty="0">
-                <a:effectLst/>
-                <a:latin typeface="fkGroteskNeue"/>
-              </a:rPr>
-              <a:t>Итак, S(200) ≈ 0.97</a:t>
-            </a:r>
-          </a:p>
-          <a:p>
-            <a:pPr algn="l"/>
-            <a:r>
-              <a:rPr lang="ru-RU" b="0" i="0" dirty="0">
-                <a:effectLst/>
-                <a:latin typeface="fkGroteskNeue"/>
-              </a:rPr>
-              <a:t>На графике это ступенчатая кривая.</a:t>
-            </a:r>
-          </a:p>
-          <a:p>
-            <a:pPr algn="l"/>
-            <a:r>
-              <a:rPr lang="ru-RU" b="0" i="0" dirty="0">
-                <a:effectLst/>
-                <a:latin typeface="fkGroteskNeue"/>
-              </a:rPr>
-              <a:t>Сравнение двух кривых:</a:t>
-            </a:r>
-          </a:p>
-          <a:p>
-            <a:pPr algn="l"/>
-            <a:r>
-              <a:rPr lang="ru-RU" b="0" i="0" dirty="0">
-                <a:effectLst/>
-                <a:latin typeface="fkGroteskNeue"/>
-              </a:rPr>
-              <a:t>Пусть у вас есть две группы пациентов: пациенты </a:t>
-            </a:r>
-            <a:r>
-              <a:rPr lang="ru-RU" b="0" i="0" dirty="0" err="1">
-                <a:effectLst/>
-                <a:latin typeface="fkGroteskNeue"/>
-              </a:rPr>
-              <a:t>vs</a:t>
-            </a:r>
-            <a:r>
-              <a:rPr lang="ru-RU" b="0" i="0" dirty="0">
-                <a:effectLst/>
-                <a:latin typeface="fkGroteskNeue"/>
-              </a:rPr>
-              <a:t> здоровые.</a:t>
-            </a:r>
-          </a:p>
-          <a:p>
-            <a:pPr algn="l"/>
-            <a:r>
-              <a:rPr lang="ru-RU" b="0" i="0" dirty="0">
-                <a:effectLst/>
-                <a:latin typeface="fkGroteskNeue"/>
-              </a:rPr>
-              <a:t>Строим две кривые Каплана-Мейера.</a:t>
-            </a:r>
-          </a:p>
-          <a:p>
-            <a:pPr algn="l"/>
-            <a:r>
-              <a:rPr lang="ru-RU" b="0" i="0" dirty="0">
-                <a:effectLst/>
-                <a:latin typeface="fkGroteskNeue"/>
-              </a:rPr>
-              <a:t>Визуально видно разницу. Но статистически ли она значима?</a:t>
-            </a:r>
-          </a:p>
-          <a:p>
             <a:endParaRPr lang="ru-RU" sz="1200" b="0" i="0" kern="1200" dirty="0">
               <a:solidFill>
                 <a:schemeClr val="tx1"/>
@@ -8498,74 +3659,6 @@
           <a:bodyPr/>
           <a:lstStyle/>
           <a:p>
-            <a:pPr algn="l"/>
-            <a:r>
-              <a:rPr lang="ru-RU" b="0" i="0" dirty="0" err="1">
-                <a:effectLst/>
-                <a:latin typeface="fkGroteskNeue"/>
-              </a:rPr>
-              <a:t>Log-rank</a:t>
-            </a:r>
-            <a:r>
-              <a:rPr lang="ru-RU" b="0" i="0" dirty="0">
-                <a:effectLst/>
-                <a:latin typeface="fkGroteskNeue"/>
-              </a:rPr>
-              <a:t> </a:t>
-            </a:r>
-            <a:r>
-              <a:rPr lang="ru-RU" b="0" i="0" dirty="0" err="1">
-                <a:effectLst/>
-                <a:latin typeface="fkGroteskNeue"/>
-              </a:rPr>
-              <a:t>test</a:t>
-            </a:r>
-            <a:r>
-              <a:rPr lang="ru-RU" b="0" i="0" dirty="0">
-                <a:effectLst/>
-                <a:latin typeface="fkGroteskNeue"/>
-              </a:rPr>
-              <a:t>:</a:t>
-            </a:r>
-          </a:p>
-          <a:p>
-            <a:pPr algn="l"/>
-            <a:r>
-              <a:rPr lang="ru-RU" b="0" i="0" dirty="0">
-                <a:effectLst/>
-                <a:latin typeface="fkGroteskNeue"/>
-              </a:rPr>
-              <a:t>Нулевая гипотеза: две кривые одинаковые.</a:t>
-            </a:r>
-          </a:p>
-          <a:p>
-            <a:pPr algn="l"/>
-            <a:r>
-              <a:rPr lang="ru-RU" b="0" i="0" dirty="0">
-                <a:effectLst/>
-                <a:latin typeface="fkGroteskNeue"/>
-              </a:rPr>
-              <a:t>Считаем χ² статистику. Если p &lt; 0.05, кривы различаются.</a:t>
-            </a:r>
-          </a:p>
-          <a:p>
-            <a:pPr algn="l"/>
-            <a:endParaRPr lang="ru-RU" b="0" i="0" dirty="0">
-              <a:effectLst/>
-              <a:latin typeface="fkGroteskNeue"/>
-            </a:endParaRPr>
-          </a:p>
-          <a:p>
-            <a:pPr algn="l"/>
-            <a:r>
-              <a:rPr lang="ru-RU" b="0" i="0" dirty="0">
-                <a:effectLst/>
-                <a:latin typeface="fkGroteskNeue"/>
-              </a:rPr>
-              <a:t>ПАУЗА</a:t>
-            </a:r>
-          </a:p>
-          <a:p>
             <a:endParaRPr lang="ru-RU" sz="1200" b="0" i="0" kern="1200" dirty="0">
               <a:solidFill>
                 <a:schemeClr val="tx1"/>
@@ -8659,131 +3752,6 @@
           <a:lstStyle/>
           <a:p>
             <a:pPr algn="l"/>
-            <a:r>
-              <a:rPr lang="ru-RU" b="0" i="0" dirty="0">
-                <a:effectLst/>
-                <a:latin typeface="pplxSerif"/>
-              </a:rPr>
-              <a:t>В этой работе TCGA‑данные по раку лёгкого используют для проверки прогностической значимости отдельных генов или генетических подписей.​</a:t>
-            </a:r>
-            <a:br>
-              <a:rPr lang="ru-RU" dirty="0"/>
-            </a:br>
-            <a:r>
-              <a:rPr lang="ru-RU" b="0" i="0" dirty="0">
-                <a:effectLst/>
-                <a:latin typeface="pplxSerif"/>
-              </a:rPr>
-              <a:t>Пациентов делят на группы строят </a:t>
-            </a:r>
-            <a:r>
-              <a:rPr lang="ru-RU" b="0" i="0" dirty="0" err="1">
-                <a:effectLst/>
-                <a:latin typeface="pplxSerif"/>
-              </a:rPr>
-              <a:t>Kaplan</a:t>
-            </a:r>
-            <a:r>
-              <a:rPr lang="ru-RU" b="0" i="0" dirty="0">
-                <a:effectLst/>
-                <a:latin typeface="pplxSerif"/>
-              </a:rPr>
-              <a:t>–</a:t>
-            </a:r>
-            <a:r>
-              <a:rPr lang="ru-RU" b="0" i="0" dirty="0" err="1">
-                <a:effectLst/>
-                <a:latin typeface="pplxSerif"/>
-              </a:rPr>
-              <a:t>Meier</a:t>
-            </a:r>
-            <a:r>
-              <a:rPr lang="ru-RU" b="0" i="0" dirty="0">
-                <a:effectLst/>
-                <a:latin typeface="pplxSerif"/>
-              </a:rPr>
-              <a:t> кривые общей выживаемости. На графике видно, что кривая группы High стабильно ниже, </a:t>
-            </a:r>
-            <a:r>
-              <a:rPr lang="ru-RU" b="0" i="0" dirty="0" err="1">
-                <a:effectLst/>
-                <a:latin typeface="pplxSerif"/>
-              </a:rPr>
-              <a:t>log‑rank</a:t>
-            </a:r>
-            <a:r>
-              <a:rPr lang="ru-RU" b="0" i="0" dirty="0">
-                <a:effectLst/>
-                <a:latin typeface="pplxSerif"/>
-              </a:rPr>
-              <a:t> p‑</a:t>
-            </a:r>
-            <a:r>
-              <a:rPr lang="ru-RU" b="0" i="0" dirty="0" err="1">
-                <a:effectLst/>
-                <a:latin typeface="pplxSerif"/>
-              </a:rPr>
-              <a:t>value</a:t>
-            </a:r>
-            <a:r>
-              <a:rPr lang="ru-RU" b="0" i="0" dirty="0">
-                <a:effectLst/>
-                <a:latin typeface="pplxSerif"/>
-              </a:rPr>
-              <a:t> &lt; 0.01 — то есть различия статистически значимы.​</a:t>
-            </a:r>
-            <a:br>
-              <a:rPr lang="ru-RU" dirty="0"/>
-            </a:br>
-            <a:r>
-              <a:rPr lang="ru-RU" b="0" i="0" dirty="0">
-                <a:effectLst/>
-                <a:latin typeface="pplxSerif"/>
-              </a:rPr>
-              <a:t>Это классический шаблон: от простого стратифицированного </a:t>
-            </a:r>
-            <a:r>
-              <a:rPr lang="ru-RU" b="0" i="0" dirty="0" err="1">
-                <a:effectLst/>
-                <a:latin typeface="pplxSerif"/>
-              </a:rPr>
-              <a:t>Kaplan</a:t>
-            </a:r>
-            <a:r>
-              <a:rPr lang="ru-RU" b="0" i="0" dirty="0">
-                <a:effectLst/>
-                <a:latin typeface="pplxSerif"/>
-              </a:rPr>
-              <a:t>–</a:t>
-            </a:r>
-            <a:r>
-              <a:rPr lang="ru-RU" b="0" i="0" dirty="0" err="1">
-                <a:effectLst/>
-                <a:latin typeface="pplxSerif"/>
-              </a:rPr>
-              <a:t>Meier</a:t>
-            </a:r>
-            <a:r>
-              <a:rPr lang="ru-RU" b="0" i="0" dirty="0">
-                <a:effectLst/>
-                <a:latin typeface="pplxSerif"/>
-              </a:rPr>
-              <a:t> мы переходим к более гибкой модели Кокса, где можно учесть сразу несколько </a:t>
-            </a:r>
-            <a:r>
-              <a:rPr lang="ru-RU" b="0" i="0" dirty="0" err="1">
-                <a:effectLst/>
-                <a:latin typeface="pplxSerif"/>
-              </a:rPr>
-              <a:t>ковариат</a:t>
-            </a:r>
-            <a:r>
-              <a:rPr lang="ru-RU" b="0" i="0" dirty="0">
-                <a:effectLst/>
-                <a:latin typeface="pplxSerif"/>
-              </a:rPr>
-              <a:t>.</a:t>
-            </a:r>
             <a:endParaRPr lang="ru-RU" sz="1200" b="0" i="0" kern="1200" dirty="0">
               <a:solidFill>
                 <a:schemeClr val="tx1"/>
